--- a/public/lessons/year-6-maths/autumn/week-2/estimate-calculations-by-rounding/teaching-powerpoint-v1.pptx
+++ b/public/lessons/year-6-maths/autumn/week-2/estimate-calculations-by-rounding/teaching-powerpoint-v1.pptx
@@ -2,24 +2,24 @@
 <file path=ppt/presentation.xml><?xml version="1.0" encoding="utf-8"?>
 <p:presentation xmlns:p="http://schemas.openxmlformats.org/presentationml/2006/main">
   <p:sldMasterIdLst>
-    <p:sldMasterId xmlns:r="http://schemas.openxmlformats.org/officeDocument/2006/relationships" id="2147483648" r:id="Rcff2aa27b90c4f96"/>
+    <p:sldMasterId xmlns:r="http://schemas.openxmlformats.org/officeDocument/2006/relationships" id="2147483648" r:id="Rf2b17c61df094c80"/>
   </p:sldMasterIdLst>
   <p:notesMasterIdLst>
-    <p:notesMasterId xmlns:r="http://schemas.openxmlformats.org/officeDocument/2006/relationships" r:id="Rdac28d263fba4e9a"/>
+    <p:notesMasterId xmlns:r="http://schemas.openxmlformats.org/officeDocument/2006/relationships" r:id="Ra38cae0df9994af0"/>
   </p:notesMasterIdLst>
   <p:sldIdLst>
-    <p:sldId xmlns:r="http://schemas.openxmlformats.org/officeDocument/2006/relationships" id="256" r:id="R041b411f00a044c9"/>
-    <p:sldId xmlns:r="http://schemas.openxmlformats.org/officeDocument/2006/relationships" id="257" r:id="Ra09c47d19cb64259"/>
-    <p:sldId xmlns:r="http://schemas.openxmlformats.org/officeDocument/2006/relationships" id="258" r:id="R59920ce9f56d41ad"/>
-    <p:sldId xmlns:r="http://schemas.openxmlformats.org/officeDocument/2006/relationships" id="259" r:id="Rb988b98a5b544d3c"/>
-    <p:sldId xmlns:r="http://schemas.openxmlformats.org/officeDocument/2006/relationships" id="260" r:id="R845f4636f2cf47cc"/>
-    <p:sldId xmlns:r="http://schemas.openxmlformats.org/officeDocument/2006/relationships" id="261" r:id="Rbe0ad8fc179f4b0a"/>
-    <p:sldId xmlns:r="http://schemas.openxmlformats.org/officeDocument/2006/relationships" id="262" r:id="R7f613339bb6f401c"/>
-    <p:sldId xmlns:r="http://schemas.openxmlformats.org/officeDocument/2006/relationships" id="263" r:id="R439308e294974fe0"/>
-    <p:sldId xmlns:r="http://schemas.openxmlformats.org/officeDocument/2006/relationships" id="264" r:id="R5899286cd94f477b"/>
-    <p:sldId xmlns:r="http://schemas.openxmlformats.org/officeDocument/2006/relationships" id="265" r:id="R43e3b418f72b4cfb"/>
-    <p:sldId xmlns:r="http://schemas.openxmlformats.org/officeDocument/2006/relationships" id="266" r:id="Rb09b6ce110954943"/>
-    <p:sldId xmlns:r="http://schemas.openxmlformats.org/officeDocument/2006/relationships" id="267" r:id="Rec28a7ca8dbf43ce"/>
+    <p:sldId xmlns:r="http://schemas.openxmlformats.org/officeDocument/2006/relationships" id="256" r:id="Rfb214cc59db94228"/>
+    <p:sldId xmlns:r="http://schemas.openxmlformats.org/officeDocument/2006/relationships" id="257" r:id="Rdc524d5875014c6d"/>
+    <p:sldId xmlns:r="http://schemas.openxmlformats.org/officeDocument/2006/relationships" id="258" r:id="Rf6d77bf1be404819"/>
+    <p:sldId xmlns:r="http://schemas.openxmlformats.org/officeDocument/2006/relationships" id="259" r:id="R3bd63d5f4ecc4fae"/>
+    <p:sldId xmlns:r="http://schemas.openxmlformats.org/officeDocument/2006/relationships" id="260" r:id="R609dbc81b48a46fc"/>
+    <p:sldId xmlns:r="http://schemas.openxmlformats.org/officeDocument/2006/relationships" id="261" r:id="Radaba17a1b774426"/>
+    <p:sldId xmlns:r="http://schemas.openxmlformats.org/officeDocument/2006/relationships" id="262" r:id="Rcb84f836a63b4105"/>
+    <p:sldId xmlns:r="http://schemas.openxmlformats.org/officeDocument/2006/relationships" id="263" r:id="R4c7d603fcb4746e1"/>
+    <p:sldId xmlns:r="http://schemas.openxmlformats.org/officeDocument/2006/relationships" id="264" r:id="R3224c1709f744472"/>
+    <p:sldId xmlns:r="http://schemas.openxmlformats.org/officeDocument/2006/relationships" id="265" r:id="R7b5947d3a2de40f4"/>
+    <p:sldId xmlns:r="http://schemas.openxmlformats.org/officeDocument/2006/relationships" id="266" r:id="R323f9bc1178749af"/>
+    <p:sldId xmlns:r="http://schemas.openxmlformats.org/officeDocument/2006/relationships" id="267" r:id="R991ef97af74c4554"/>
   </p:sldIdLst>
   <p:sldSz cx="12192000" cy="6858000"/>
   <p:notesSz cx="6858000" cy="9144000"/>
@@ -873,7 +873,7 @@
           <a:lstStyle xmlns:a="http://schemas.openxmlformats.org/drawingml/2006/main"/>
           <a:p xmlns:a="http://schemas.openxmlformats.org/drawingml/2006/main">
             <a:r>
-              <a:t>I do. Reveal the question, setup and each calculation stage one click at a time. Pupils watch before copying. Model answer: 400,000 + 200,000 = 600,000.</a:t>
+              <a:t>I do. Reveal the question, then reveal each mathematical change one click at a time. Point to the numbers and operation that changed before moving to the next line. Final answer: 400,000 + 200,000 = 600,000.</a:t>
             </a:r>
           </a:p>
         </p:txBody>
@@ -1291,7 +1291,7 @@
   </p:cSld>
   <p:clrMap bg1="lt1" tx1="dk1" bg2="lt2" tx2="dk2" accent1="accent1" accent2="accent2" accent3="accent3" accent4="accent4" accent5="accent5" accent6="accent6" hlink="hlink" folHlink="folHlink"/>
   <p:sldLayoutIdLst>
-    <p:sldLayoutId xmlns:r="http://schemas.openxmlformats.org/officeDocument/2006/relationships" id="2147483649" r:id="R64ab732ed4d04353"/>
+    <p:sldLayoutId xmlns:r="http://schemas.openxmlformats.org/officeDocument/2006/relationships" id="2147483649" r:id="Ref2365cd074d43e0"/>
   </p:sldLayoutIdLst>
   <p:txStyles>
     <p:titleStyle>
@@ -1842,7 +1842,7 @@
           <p:cNvPr id="12" name="">
             <a:extLst xmlns:a="http://schemas.openxmlformats.org/drawingml/2006/main">
               <a:ext uri="{FF2B5EF4-FFF2-40B4-BE49-F238E27FC236}">
-                <a16:creationId xmlns:a16="http://schemas.microsoft.com/office/drawing/2014/main" id="{AF3D7528-FD06-4878-81DB-1EF9F2F6D873}"/>
+                <a16:creationId xmlns:a16="http://schemas.microsoft.com/office/drawing/2014/main" id="{314A2A15-0A34-4DFB-81F2-891BF5F6A5F3}"/>
               </a:ext>
             </a:extLst>
           </p:cNvPr>
@@ -1874,7 +1874,7 @@
           <p:cNvPr id="2" name="">
             <a:extLst xmlns:a="http://schemas.openxmlformats.org/drawingml/2006/main">
               <a:ext uri="{FF2B5EF4-FFF2-40B4-BE49-F238E27FC236}">
-                <a16:creationId xmlns:a16="http://schemas.microsoft.com/office/drawing/2014/main" id="{18DC2736-0C71-4916-B1E1-4A4A115B062A}"/>
+                <a16:creationId xmlns:a16="http://schemas.microsoft.com/office/drawing/2014/main" id="{8E6FE384-D72F-4F3E-8BD8-2B17E27CDCD7}"/>
               </a:ext>
             </a:extLst>
           </p:cNvPr>
@@ -1931,7 +1931,7 @@
           <p:cNvPr id="3" name="">
             <a:extLst xmlns:a="http://schemas.openxmlformats.org/drawingml/2006/main">
               <a:ext uri="{FF2B5EF4-FFF2-40B4-BE49-F238E27FC236}">
-                <a16:creationId xmlns:a16="http://schemas.microsoft.com/office/drawing/2014/main" id="{DE38863C-24D6-42BD-BA2A-6ABB75703A3F}"/>
+                <a16:creationId xmlns:a16="http://schemas.microsoft.com/office/drawing/2014/main" id="{E506CEFA-5614-4BAC-9F76-11FDBCD0FB5B}"/>
               </a:ext>
             </a:extLst>
           </p:cNvPr>
@@ -1965,7 +1965,7 @@
           <p:cNvPr id="4" name="">
             <a:extLst xmlns:a="http://schemas.openxmlformats.org/drawingml/2006/main">
               <a:ext uri="{FF2B5EF4-FFF2-40B4-BE49-F238E27FC236}">
-                <a16:creationId xmlns:a16="http://schemas.microsoft.com/office/drawing/2014/main" id="{3BC32F78-8782-4840-8556-C26EAA1A7BC0}"/>
+                <a16:creationId xmlns:a16="http://schemas.microsoft.com/office/drawing/2014/main" id="{242E78B9-5C20-4F0E-B4E8-902387291AAB}"/>
               </a:ext>
             </a:extLst>
           </p:cNvPr>
@@ -2022,7 +2022,7 @@
           <p:cNvPr id="5" name="">
             <a:extLst xmlns:a="http://schemas.openxmlformats.org/drawingml/2006/main">
               <a:ext uri="{FF2B5EF4-FFF2-40B4-BE49-F238E27FC236}">
-                <a16:creationId xmlns:a16="http://schemas.microsoft.com/office/drawing/2014/main" id="{3C47589E-1656-4DD8-9E84-DF91CACE9518}"/>
+                <a16:creationId xmlns:a16="http://schemas.microsoft.com/office/drawing/2014/main" id="{95ACE7AA-26D2-40F7-BEDE-2586A74500FF}"/>
               </a:ext>
             </a:extLst>
           </p:cNvPr>
@@ -2079,7 +2079,7 @@
           <p:cNvPr id="6" name="">
             <a:extLst xmlns:a="http://schemas.openxmlformats.org/drawingml/2006/main">
               <a:ext uri="{FF2B5EF4-FFF2-40B4-BE49-F238E27FC236}">
-                <a16:creationId xmlns:a16="http://schemas.microsoft.com/office/drawing/2014/main" id="{822B8893-E910-4374-83AC-C09E2C007614}"/>
+                <a16:creationId xmlns:a16="http://schemas.microsoft.com/office/drawing/2014/main" id="{897D59FA-8B5E-41B6-9A7F-C83449B51F20}"/>
               </a:ext>
             </a:extLst>
           </p:cNvPr>
@@ -2113,7 +2113,7 @@
           <p:cNvPr id="7" name="">
             <a:extLst xmlns:a="http://schemas.openxmlformats.org/drawingml/2006/main">
               <a:ext uri="{FF2B5EF4-FFF2-40B4-BE49-F238E27FC236}">
-                <a16:creationId xmlns:a16="http://schemas.microsoft.com/office/drawing/2014/main" id="{D0C15C38-C123-4829-BAA9-6DC230C5DC51}"/>
+                <a16:creationId xmlns:a16="http://schemas.microsoft.com/office/drawing/2014/main" id="{B2AD2EC7-F902-4F5A-B163-A0B9BEA5B673}"/>
               </a:ext>
             </a:extLst>
           </p:cNvPr>
@@ -2170,7 +2170,7 @@
           <p:cNvPr id="8" name="">
             <a:extLst xmlns:a="http://schemas.openxmlformats.org/drawingml/2006/main">
               <a:ext uri="{FF2B5EF4-FFF2-40B4-BE49-F238E27FC236}">
-                <a16:creationId xmlns:a16="http://schemas.microsoft.com/office/drawing/2014/main" id="{80F42508-848A-43B8-B6AD-98B297A2CF72}"/>
+                <a16:creationId xmlns:a16="http://schemas.microsoft.com/office/drawing/2014/main" id="{06EB24F1-5446-48ED-AEDD-A079986B9ED5}"/>
               </a:ext>
             </a:extLst>
           </p:cNvPr>
@@ -2227,7 +2227,7 @@
           <p:cNvPr id="9" name="">
             <a:extLst xmlns:a="http://schemas.openxmlformats.org/drawingml/2006/main">
               <a:ext uri="{FF2B5EF4-FFF2-40B4-BE49-F238E27FC236}">
-                <a16:creationId xmlns:a16="http://schemas.microsoft.com/office/drawing/2014/main" id="{22B4ED2C-8E93-45E0-B26E-6FB5E826624A}"/>
+                <a16:creationId xmlns:a16="http://schemas.microsoft.com/office/drawing/2014/main" id="{3CAC52A1-8C0F-4446-808E-9FCB4D2A2EF5}"/>
               </a:ext>
             </a:extLst>
           </p:cNvPr>
@@ -2284,7 +2284,7 @@
           <p:cNvPr id="10" name="">
             <a:extLst xmlns:a="http://schemas.openxmlformats.org/drawingml/2006/main">
               <a:ext uri="{FF2B5EF4-FFF2-40B4-BE49-F238E27FC236}">
-                <a16:creationId xmlns:a16="http://schemas.microsoft.com/office/drawing/2014/main" id="{1097857A-A94F-49EA-A864-DA329B9B0D87}"/>
+                <a16:creationId xmlns:a16="http://schemas.microsoft.com/office/drawing/2014/main" id="{2A344C83-3BE2-4919-A4AB-B8965830E42B}"/>
               </a:ext>
             </a:extLst>
           </p:cNvPr>
@@ -2341,7 +2341,7 @@
           <p:cNvPr id="11" name="">
             <a:extLst xmlns:a="http://schemas.openxmlformats.org/drawingml/2006/main">
               <a:ext uri="{FF2B5EF4-FFF2-40B4-BE49-F238E27FC236}">
-                <a16:creationId xmlns:a16="http://schemas.microsoft.com/office/drawing/2014/main" id="{4519E885-9EC6-4B02-88BA-6D8238DEFDF6}"/>
+                <a16:creationId xmlns:a16="http://schemas.microsoft.com/office/drawing/2014/main" id="{8327A86C-78F0-4C26-A173-4A8A2ED3F76F}"/>
               </a:ext>
             </a:extLst>
           </p:cNvPr>
@@ -2396,7 +2396,7 @@
     </p:spTree>
     <p:extLst>
       <p:ext uri="{BB962C8B-B14F-4D97-AF65-F5344CB8AC3E}">
-        <p14:creationId xmlns:p14="http://schemas.microsoft.com/office/powerpoint/2010/main" val="1453270847"/>
+        <p14:creationId xmlns:p14="http://schemas.microsoft.com/office/powerpoint/2010/main" val="105786750"/>
       </p:ext>
     </p:extLst>
   </p:cSld>
@@ -2427,7 +2427,7 @@
           <p:cNvPr id="14" name="">
             <a:extLst xmlns:a="http://schemas.openxmlformats.org/drawingml/2006/main">
               <a:ext uri="{FF2B5EF4-FFF2-40B4-BE49-F238E27FC236}">
-                <a16:creationId xmlns:a16="http://schemas.microsoft.com/office/drawing/2014/main" id="{8D22F246-AE77-4BD2-BA7D-5FE52F7E5F03}"/>
+                <a16:creationId xmlns:a16="http://schemas.microsoft.com/office/drawing/2014/main" id="{727ED7D1-264A-453A-8FC8-22E7B30B540A}"/>
               </a:ext>
             </a:extLst>
           </p:cNvPr>
@@ -2459,7 +2459,7 @@
           <p:cNvPr id="2" name="">
             <a:extLst xmlns:a="http://schemas.openxmlformats.org/drawingml/2006/main">
               <a:ext uri="{FF2B5EF4-FFF2-40B4-BE49-F238E27FC236}">
-                <a16:creationId xmlns:a16="http://schemas.microsoft.com/office/drawing/2014/main" id="{F254BE67-20B1-40D2-8B35-9AF1824D1215}"/>
+                <a16:creationId xmlns:a16="http://schemas.microsoft.com/office/drawing/2014/main" id="{50AB9154-F695-401D-A307-2FE7C8547046}"/>
               </a:ext>
             </a:extLst>
           </p:cNvPr>
@@ -2516,7 +2516,7 @@
           <p:cNvPr id="3" name="">
             <a:extLst xmlns:a="http://schemas.openxmlformats.org/drawingml/2006/main">
               <a:ext uri="{FF2B5EF4-FFF2-40B4-BE49-F238E27FC236}">
-                <a16:creationId xmlns:a16="http://schemas.microsoft.com/office/drawing/2014/main" id="{1CF6768B-F183-4CDF-9EFF-DDF87ED979E6}"/>
+                <a16:creationId xmlns:a16="http://schemas.microsoft.com/office/drawing/2014/main" id="{F06C86A8-C672-44D4-8C67-2674B2246754}"/>
               </a:ext>
             </a:extLst>
           </p:cNvPr>
@@ -2548,7 +2548,7 @@
           <p:cNvPr id="4" name="">
             <a:extLst xmlns:a="http://schemas.openxmlformats.org/drawingml/2006/main">
               <a:ext uri="{FF2B5EF4-FFF2-40B4-BE49-F238E27FC236}">
-                <a16:creationId xmlns:a16="http://schemas.microsoft.com/office/drawing/2014/main" id="{9B6865E8-84C5-407B-92B6-32FFCDB29DD8}"/>
+                <a16:creationId xmlns:a16="http://schemas.microsoft.com/office/drawing/2014/main" id="{3A530C48-A264-479C-B05F-2678B3B724AA}"/>
               </a:ext>
             </a:extLst>
           </p:cNvPr>
@@ -2605,7 +2605,7 @@
           <p:cNvPr id="5" name="">
             <a:extLst xmlns:a="http://schemas.openxmlformats.org/drawingml/2006/main">
               <a:ext uri="{FF2B5EF4-FFF2-40B4-BE49-F238E27FC236}">
-                <a16:creationId xmlns:a16="http://schemas.microsoft.com/office/drawing/2014/main" id="{D6ED874E-0BAE-4853-8C6B-928F909D83B7}"/>
+                <a16:creationId xmlns:a16="http://schemas.microsoft.com/office/drawing/2014/main" id="{E063D8B4-8307-40F4-B22D-89F097DAD8E6}"/>
               </a:ext>
             </a:extLst>
           </p:cNvPr>
@@ -2662,7 +2662,7 @@
           <p:cNvPr id="6" name="">
             <a:extLst xmlns:a="http://schemas.openxmlformats.org/drawingml/2006/main">
               <a:ext uri="{FF2B5EF4-FFF2-40B4-BE49-F238E27FC236}">
-                <a16:creationId xmlns:a16="http://schemas.microsoft.com/office/drawing/2014/main" id="{306A62F8-2821-49B8-B8E4-649FA90EDABB}"/>
+                <a16:creationId xmlns:a16="http://schemas.microsoft.com/office/drawing/2014/main" id="{AC70206C-781F-4461-AF9E-DDAB026C6565}"/>
               </a:ext>
             </a:extLst>
           </p:cNvPr>
@@ -2719,7 +2719,7 @@
           <p:cNvPr id="7" name="">
             <a:extLst xmlns:a="http://schemas.openxmlformats.org/drawingml/2006/main">
               <a:ext uri="{FF2B5EF4-FFF2-40B4-BE49-F238E27FC236}">
-                <a16:creationId xmlns:a16="http://schemas.microsoft.com/office/drawing/2014/main" id="{F949831D-9C53-4EB2-BE78-A47A3649FFB2}"/>
+                <a16:creationId xmlns:a16="http://schemas.microsoft.com/office/drawing/2014/main" id="{63C9CC2F-8F83-4330-A93C-61D24B6458BC}"/>
               </a:ext>
             </a:extLst>
           </p:cNvPr>
@@ -2751,7 +2751,7 @@
           <p:cNvPr id="8" name="">
             <a:extLst xmlns:a="http://schemas.openxmlformats.org/drawingml/2006/main">
               <a:ext uri="{FF2B5EF4-FFF2-40B4-BE49-F238E27FC236}">
-                <a16:creationId xmlns:a16="http://schemas.microsoft.com/office/drawing/2014/main" id="{9FBAF5B6-7534-4006-8CCB-AF5305580E61}"/>
+                <a16:creationId xmlns:a16="http://schemas.microsoft.com/office/drawing/2014/main" id="{28A52761-B244-408F-A055-5DBBD928901E}"/>
               </a:ext>
             </a:extLst>
           </p:cNvPr>
@@ -2808,7 +2808,7 @@
           <p:cNvPr id="9" name="">
             <a:extLst xmlns:a="http://schemas.openxmlformats.org/drawingml/2006/main">
               <a:ext uri="{FF2B5EF4-FFF2-40B4-BE49-F238E27FC236}">
-                <a16:creationId xmlns:a16="http://schemas.microsoft.com/office/drawing/2014/main" id="{7DC9A3B5-C064-4F04-B159-3C224620CBF5}"/>
+                <a16:creationId xmlns:a16="http://schemas.microsoft.com/office/drawing/2014/main" id="{E2192906-7C81-425D-95F1-BEFE3B642E4D}"/>
               </a:ext>
             </a:extLst>
           </p:cNvPr>
@@ -2865,7 +2865,7 @@
           <p:cNvPr id="10" name="">
             <a:extLst xmlns:a="http://schemas.openxmlformats.org/drawingml/2006/main">
               <a:ext uri="{FF2B5EF4-FFF2-40B4-BE49-F238E27FC236}">
-                <a16:creationId xmlns:a16="http://schemas.microsoft.com/office/drawing/2014/main" id="{2DD5C54A-9763-4133-A192-ACEF37D32CC0}"/>
+                <a16:creationId xmlns:a16="http://schemas.microsoft.com/office/drawing/2014/main" id="{71162F87-80AC-49F8-AAE7-0C212BA4F16D}"/>
               </a:ext>
             </a:extLst>
           </p:cNvPr>
@@ -2922,7 +2922,7 @@
           <p:cNvPr id="11" name="">
             <a:extLst xmlns:a="http://schemas.openxmlformats.org/drawingml/2006/main">
               <a:ext uri="{FF2B5EF4-FFF2-40B4-BE49-F238E27FC236}">
-                <a16:creationId xmlns:a16="http://schemas.microsoft.com/office/drawing/2014/main" id="{6E001E31-E066-469F-8887-60182365E5C5}"/>
+                <a16:creationId xmlns:a16="http://schemas.microsoft.com/office/drawing/2014/main" id="{FDC2CC3C-9724-4443-ABB9-405DD66A2EA1}"/>
               </a:ext>
             </a:extLst>
           </p:cNvPr>
@@ -2979,7 +2979,7 @@
           <p:cNvPr id="12" name="">
             <a:extLst xmlns:a="http://schemas.openxmlformats.org/drawingml/2006/main">
               <a:ext uri="{FF2B5EF4-FFF2-40B4-BE49-F238E27FC236}">
-                <a16:creationId xmlns:a16="http://schemas.microsoft.com/office/drawing/2014/main" id="{7637709A-8D4E-46B1-9F81-1F050CDB6311}"/>
+                <a16:creationId xmlns:a16="http://schemas.microsoft.com/office/drawing/2014/main" id="{FC35F94E-0A65-4E31-8FCE-669A782FA4A3}"/>
               </a:ext>
             </a:extLst>
           </p:cNvPr>
@@ -3036,7 +3036,7 @@
           <p:cNvPr id="13" name="">
             <a:extLst xmlns:a="http://schemas.openxmlformats.org/drawingml/2006/main">
               <a:ext uri="{FF2B5EF4-FFF2-40B4-BE49-F238E27FC236}">
-                <a16:creationId xmlns:a16="http://schemas.microsoft.com/office/drawing/2014/main" id="{17A6230A-03E8-417C-8E7F-7CE97085CFCB}"/>
+                <a16:creationId xmlns:a16="http://schemas.microsoft.com/office/drawing/2014/main" id="{823428B0-80CA-48A4-9F2C-579E62566E79}"/>
               </a:ext>
             </a:extLst>
           </p:cNvPr>
@@ -3091,7 +3091,7 @@
     </p:spTree>
     <p:extLst>
       <p:ext uri="{BB962C8B-B14F-4D97-AF65-F5344CB8AC3E}">
-        <p14:creationId xmlns:p14="http://schemas.microsoft.com/office/powerpoint/2010/main" val="1566608186"/>
+        <p14:creationId xmlns:p14="http://schemas.microsoft.com/office/powerpoint/2010/main" val="1857757264"/>
       </p:ext>
     </p:extLst>
   </p:cSld>
@@ -3292,7 +3292,7 @@
           <p:cNvPr id="19" name="">
             <a:extLst xmlns:a="http://schemas.openxmlformats.org/drawingml/2006/main">
               <a:ext uri="{FF2B5EF4-FFF2-40B4-BE49-F238E27FC236}">
-                <a16:creationId xmlns:a16="http://schemas.microsoft.com/office/drawing/2014/main" id="{D3E3CEC3-D261-4C0B-B563-59979AE5505E}"/>
+                <a16:creationId xmlns:a16="http://schemas.microsoft.com/office/drawing/2014/main" id="{42EBA343-57F8-4FC5-BCCC-56AA3D1D610B}"/>
               </a:ext>
             </a:extLst>
           </p:cNvPr>
@@ -3324,7 +3324,7 @@
           <p:cNvPr id="2" name="">
             <a:extLst xmlns:a="http://schemas.openxmlformats.org/drawingml/2006/main">
               <a:ext uri="{FF2B5EF4-FFF2-40B4-BE49-F238E27FC236}">
-                <a16:creationId xmlns:a16="http://schemas.microsoft.com/office/drawing/2014/main" id="{E25039D2-0C7F-4B1E-9E07-7866E18301EA}"/>
+                <a16:creationId xmlns:a16="http://schemas.microsoft.com/office/drawing/2014/main" id="{25DEAE02-B3B8-4443-A664-98389A9A7C94}"/>
               </a:ext>
             </a:extLst>
           </p:cNvPr>
@@ -3381,7 +3381,7 @@
           <p:cNvPr id="3" name="">
             <a:extLst xmlns:a="http://schemas.openxmlformats.org/drawingml/2006/main">
               <a:ext uri="{FF2B5EF4-FFF2-40B4-BE49-F238E27FC236}">
-                <a16:creationId xmlns:a16="http://schemas.microsoft.com/office/drawing/2014/main" id="{58C589EC-BBEA-4BC5-8FEE-C61EA573F538}"/>
+                <a16:creationId xmlns:a16="http://schemas.microsoft.com/office/drawing/2014/main" id="{E0F8A824-2094-4C32-885A-8F5B75061099}"/>
               </a:ext>
             </a:extLst>
           </p:cNvPr>
@@ -3413,7 +3413,7 @@
           <p:cNvPr id="4" name="">
             <a:extLst xmlns:a="http://schemas.openxmlformats.org/drawingml/2006/main">
               <a:ext uri="{FF2B5EF4-FFF2-40B4-BE49-F238E27FC236}">
-                <a16:creationId xmlns:a16="http://schemas.microsoft.com/office/drawing/2014/main" id="{98C350DE-269B-4721-B7CE-150A1A9C5AF1}"/>
+                <a16:creationId xmlns:a16="http://schemas.microsoft.com/office/drawing/2014/main" id="{423CA298-0B08-4C03-9651-5F22BDE6A738}"/>
               </a:ext>
             </a:extLst>
           </p:cNvPr>
@@ -3470,7 +3470,7 @@
           <p:cNvPr id="5" name="">
             <a:extLst xmlns:a="http://schemas.openxmlformats.org/drawingml/2006/main">
               <a:ext uri="{FF2B5EF4-FFF2-40B4-BE49-F238E27FC236}">
-                <a16:creationId xmlns:a16="http://schemas.microsoft.com/office/drawing/2014/main" id="{1F9B5864-8696-4BA3-B69F-DEBAF3A6D7D6}"/>
+                <a16:creationId xmlns:a16="http://schemas.microsoft.com/office/drawing/2014/main" id="{9722DA61-04AA-4799-97BD-6E7ED90C5C1F}"/>
               </a:ext>
             </a:extLst>
           </p:cNvPr>
@@ -3527,7 +3527,7 @@
           <p:cNvPr id="6" name="">
             <a:extLst xmlns:a="http://schemas.openxmlformats.org/drawingml/2006/main">
               <a:ext uri="{FF2B5EF4-FFF2-40B4-BE49-F238E27FC236}">
-                <a16:creationId xmlns:a16="http://schemas.microsoft.com/office/drawing/2014/main" id="{6C5172A6-6B7F-4EEE-BDFE-9745955C6FB4}"/>
+                <a16:creationId xmlns:a16="http://schemas.microsoft.com/office/drawing/2014/main" id="{66E2127D-A7CB-4229-94E5-DEFD347C6F62}"/>
               </a:ext>
             </a:extLst>
           </p:cNvPr>
@@ -3584,7 +3584,7 @@
           <p:cNvPr id="7" name="">
             <a:extLst xmlns:a="http://schemas.openxmlformats.org/drawingml/2006/main">
               <a:ext uri="{FF2B5EF4-FFF2-40B4-BE49-F238E27FC236}">
-                <a16:creationId xmlns:a16="http://schemas.microsoft.com/office/drawing/2014/main" id="{153A421C-F2D6-47D5-B618-BBE575E433C4}"/>
+                <a16:creationId xmlns:a16="http://schemas.microsoft.com/office/drawing/2014/main" id="{85958113-ED86-4A85-9F48-14B43F5245D7}"/>
               </a:ext>
             </a:extLst>
           </p:cNvPr>
@@ -3616,7 +3616,7 @@
           <p:cNvPr id="8" name="">
             <a:extLst xmlns:a="http://schemas.openxmlformats.org/drawingml/2006/main">
               <a:ext uri="{FF2B5EF4-FFF2-40B4-BE49-F238E27FC236}">
-                <a16:creationId xmlns:a16="http://schemas.microsoft.com/office/drawing/2014/main" id="{69B50B9F-791B-4850-9F54-55F4840571D4}"/>
+                <a16:creationId xmlns:a16="http://schemas.microsoft.com/office/drawing/2014/main" id="{07664BBC-C0C4-4383-9CED-982A7C9B55B1}"/>
               </a:ext>
             </a:extLst>
           </p:cNvPr>
@@ -3673,7 +3673,7 @@
           <p:cNvPr id="9" name="">
             <a:extLst xmlns:a="http://schemas.openxmlformats.org/drawingml/2006/main">
               <a:ext uri="{FF2B5EF4-FFF2-40B4-BE49-F238E27FC236}">
-                <a16:creationId xmlns:a16="http://schemas.microsoft.com/office/drawing/2014/main" id="{82D2F101-EBD0-4EDE-A792-000B4A784E3C}"/>
+                <a16:creationId xmlns:a16="http://schemas.microsoft.com/office/drawing/2014/main" id="{FC62D208-F4DE-485D-9C9D-C7DD2CDD1747}"/>
               </a:ext>
             </a:extLst>
           </p:cNvPr>
@@ -3730,7 +3730,7 @@
           <p:cNvPr id="10" name="">
             <a:extLst xmlns:a="http://schemas.openxmlformats.org/drawingml/2006/main">
               <a:ext uri="{FF2B5EF4-FFF2-40B4-BE49-F238E27FC236}">
-                <a16:creationId xmlns:a16="http://schemas.microsoft.com/office/drawing/2014/main" id="{EA2B2362-E365-4DE7-9A40-BE85D5BBF833}"/>
+                <a16:creationId xmlns:a16="http://schemas.microsoft.com/office/drawing/2014/main" id="{E86E128B-3797-41CF-AE52-C09485864C00}"/>
               </a:ext>
             </a:extLst>
           </p:cNvPr>
@@ -3787,7 +3787,7 @@
           <p:cNvPr id="11" name="">
             <a:extLst xmlns:a="http://schemas.openxmlformats.org/drawingml/2006/main">
               <a:ext uri="{FF2B5EF4-FFF2-40B4-BE49-F238E27FC236}">
-                <a16:creationId xmlns:a16="http://schemas.microsoft.com/office/drawing/2014/main" id="{CE6F7070-E906-423A-B191-B1D80CCC6975}"/>
+                <a16:creationId xmlns:a16="http://schemas.microsoft.com/office/drawing/2014/main" id="{AA938EC7-7D29-4402-89E8-F1E7FBCCF37A}"/>
               </a:ext>
             </a:extLst>
           </p:cNvPr>
@@ -3821,7 +3821,7 @@
           <p:cNvPr id="12" name="">
             <a:extLst xmlns:a="http://schemas.openxmlformats.org/drawingml/2006/main">
               <a:ext uri="{FF2B5EF4-FFF2-40B4-BE49-F238E27FC236}">
-                <a16:creationId xmlns:a16="http://schemas.microsoft.com/office/drawing/2014/main" id="{A8637BCB-0558-4C34-B62C-EB647234507B}"/>
+                <a16:creationId xmlns:a16="http://schemas.microsoft.com/office/drawing/2014/main" id="{D0EDFC6C-92EF-4A9F-BBA8-C5000D9100FA}"/>
               </a:ext>
             </a:extLst>
           </p:cNvPr>
@@ -3878,7 +3878,7 @@
           <p:cNvPr id="13" name="">
             <a:extLst xmlns:a="http://schemas.openxmlformats.org/drawingml/2006/main">
               <a:ext uri="{FF2B5EF4-FFF2-40B4-BE49-F238E27FC236}">
-                <a16:creationId xmlns:a16="http://schemas.microsoft.com/office/drawing/2014/main" id="{D167991A-20F1-417C-A1BB-FF257B122D58}"/>
+                <a16:creationId xmlns:a16="http://schemas.microsoft.com/office/drawing/2014/main" id="{360F9E13-A298-4C5A-B2E8-8F7DA05FD3D8}"/>
               </a:ext>
             </a:extLst>
           </p:cNvPr>
@@ -3935,7 +3935,7 @@
           <p:cNvPr id="14" name="">
             <a:extLst xmlns:a="http://schemas.openxmlformats.org/drawingml/2006/main">
               <a:ext uri="{FF2B5EF4-FFF2-40B4-BE49-F238E27FC236}">
-                <a16:creationId xmlns:a16="http://schemas.microsoft.com/office/drawing/2014/main" id="{AD014F70-4D32-4A79-9712-ECB01857D767}"/>
+                <a16:creationId xmlns:a16="http://schemas.microsoft.com/office/drawing/2014/main" id="{EC3AABF7-48E7-439A-B5D8-AF685DCCF1EB}"/>
               </a:ext>
             </a:extLst>
           </p:cNvPr>
@@ -3992,7 +3992,7 @@
           <p:cNvPr id="15" name="">
             <a:extLst xmlns:a="http://schemas.openxmlformats.org/drawingml/2006/main">
               <a:ext uri="{FF2B5EF4-FFF2-40B4-BE49-F238E27FC236}">
-                <a16:creationId xmlns:a16="http://schemas.microsoft.com/office/drawing/2014/main" id="{6FEEA966-2247-4642-8228-D83FAB728AC6}"/>
+                <a16:creationId xmlns:a16="http://schemas.microsoft.com/office/drawing/2014/main" id="{4C8F3613-E390-4F72-B021-29FC2D60C0AB}"/>
               </a:ext>
             </a:extLst>
           </p:cNvPr>
@@ -4026,7 +4026,7 @@
           <p:cNvPr id="16" name="">
             <a:extLst xmlns:a="http://schemas.openxmlformats.org/drawingml/2006/main">
               <a:ext uri="{FF2B5EF4-FFF2-40B4-BE49-F238E27FC236}">
-                <a16:creationId xmlns:a16="http://schemas.microsoft.com/office/drawing/2014/main" id="{BB515D56-8132-443C-B0C7-705F10E81C3B}"/>
+                <a16:creationId xmlns:a16="http://schemas.microsoft.com/office/drawing/2014/main" id="{AAE9CF3B-75BB-402C-BA38-30E9BB92B964}"/>
               </a:ext>
             </a:extLst>
           </p:cNvPr>
@@ -4083,7 +4083,7 @@
           <p:cNvPr id="17" name="">
             <a:extLst xmlns:a="http://schemas.openxmlformats.org/drawingml/2006/main">
               <a:ext uri="{FF2B5EF4-FFF2-40B4-BE49-F238E27FC236}">
-                <a16:creationId xmlns:a16="http://schemas.microsoft.com/office/drawing/2014/main" id="{025A20F1-AA58-4E46-A9A3-7A494F7E32C6}"/>
+                <a16:creationId xmlns:a16="http://schemas.microsoft.com/office/drawing/2014/main" id="{00C56304-2F82-440D-A4B9-DA5582CABFA2}"/>
               </a:ext>
             </a:extLst>
           </p:cNvPr>
@@ -4140,7 +4140,7 @@
           <p:cNvPr id="18" name="">
             <a:extLst xmlns:a="http://schemas.openxmlformats.org/drawingml/2006/main">
               <a:ext uri="{FF2B5EF4-FFF2-40B4-BE49-F238E27FC236}">
-                <a16:creationId xmlns:a16="http://schemas.microsoft.com/office/drawing/2014/main" id="{A54B8124-4FD9-4492-837E-6174EFF72FF0}"/>
+                <a16:creationId xmlns:a16="http://schemas.microsoft.com/office/drawing/2014/main" id="{1A748538-5160-4944-840B-5F008663D0A5}"/>
               </a:ext>
             </a:extLst>
           </p:cNvPr>
@@ -4195,7 +4195,7 @@
     </p:spTree>
     <p:extLst>
       <p:ext uri="{BB962C8B-B14F-4D97-AF65-F5344CB8AC3E}">
-        <p14:creationId xmlns:p14="http://schemas.microsoft.com/office/powerpoint/2010/main" val="875834864"/>
+        <p14:creationId xmlns:p14="http://schemas.microsoft.com/office/powerpoint/2010/main" val="1563044386"/>
       </p:ext>
     </p:extLst>
   </p:cSld>
@@ -4350,7 +4350,7 @@
           <p:cNvPr id="23" name="">
             <a:extLst xmlns:a="http://schemas.openxmlformats.org/drawingml/2006/main">
               <a:ext uri="{FF2B5EF4-FFF2-40B4-BE49-F238E27FC236}">
-                <a16:creationId xmlns:a16="http://schemas.microsoft.com/office/drawing/2014/main" id="{D80EDF77-A80B-4706-888F-283D2174715D}"/>
+                <a16:creationId xmlns:a16="http://schemas.microsoft.com/office/drawing/2014/main" id="{A52A14F3-D150-4847-8427-3BEC8F4AFDAD}"/>
               </a:ext>
             </a:extLst>
           </p:cNvPr>
@@ -4382,7 +4382,7 @@
           <p:cNvPr id="2" name="">
             <a:extLst xmlns:a="http://schemas.openxmlformats.org/drawingml/2006/main">
               <a:ext uri="{FF2B5EF4-FFF2-40B4-BE49-F238E27FC236}">
-                <a16:creationId xmlns:a16="http://schemas.microsoft.com/office/drawing/2014/main" id="{7109356B-2F89-4C86-A602-366D15928F80}"/>
+                <a16:creationId xmlns:a16="http://schemas.microsoft.com/office/drawing/2014/main" id="{2BA96AAE-5A53-4915-B66A-469DA25903E9}"/>
               </a:ext>
             </a:extLst>
           </p:cNvPr>
@@ -4439,7 +4439,7 @@
           <p:cNvPr id="3" name="">
             <a:extLst xmlns:a="http://schemas.openxmlformats.org/drawingml/2006/main">
               <a:ext uri="{FF2B5EF4-FFF2-40B4-BE49-F238E27FC236}">
-                <a16:creationId xmlns:a16="http://schemas.microsoft.com/office/drawing/2014/main" id="{0E2FE514-36D6-4C84-9F05-F77E30385E97}"/>
+                <a16:creationId xmlns:a16="http://schemas.microsoft.com/office/drawing/2014/main" id="{BECE3AE2-23E3-48B2-81D6-3B3C2F735F94}"/>
               </a:ext>
             </a:extLst>
           </p:cNvPr>
@@ -4471,7 +4471,7 @@
           <p:cNvPr id="4" name="">
             <a:extLst xmlns:a="http://schemas.openxmlformats.org/drawingml/2006/main">
               <a:ext uri="{FF2B5EF4-FFF2-40B4-BE49-F238E27FC236}">
-                <a16:creationId xmlns:a16="http://schemas.microsoft.com/office/drawing/2014/main" id="{CC80E3EF-3F89-4EF6-A708-65CC4EE709B9}"/>
+                <a16:creationId xmlns:a16="http://schemas.microsoft.com/office/drawing/2014/main" id="{141DE727-FAF7-4364-83E8-2A7EAF2E6AC1}"/>
               </a:ext>
             </a:extLst>
           </p:cNvPr>
@@ -4528,7 +4528,7 @@
           <p:cNvPr id="5" name="">
             <a:extLst xmlns:a="http://schemas.openxmlformats.org/drawingml/2006/main">
               <a:ext uri="{FF2B5EF4-FFF2-40B4-BE49-F238E27FC236}">
-                <a16:creationId xmlns:a16="http://schemas.microsoft.com/office/drawing/2014/main" id="{8B5A7633-82D9-4E86-B49E-CDA9D4C23CAD}"/>
+                <a16:creationId xmlns:a16="http://schemas.microsoft.com/office/drawing/2014/main" id="{393E38F3-992F-4B04-9FBC-D8D226865A8C}"/>
               </a:ext>
             </a:extLst>
           </p:cNvPr>
@@ -4585,7 +4585,7 @@
           <p:cNvPr id="6" name="">
             <a:extLst xmlns:a="http://schemas.openxmlformats.org/drawingml/2006/main">
               <a:ext uri="{FF2B5EF4-FFF2-40B4-BE49-F238E27FC236}">
-                <a16:creationId xmlns:a16="http://schemas.microsoft.com/office/drawing/2014/main" id="{4DC9CBCD-F484-42BF-9FA1-04E5973604F7}"/>
+                <a16:creationId xmlns:a16="http://schemas.microsoft.com/office/drawing/2014/main" id="{ED3B5AC9-EF33-4267-A028-7FDB69DD152C}"/>
               </a:ext>
             </a:extLst>
           </p:cNvPr>
@@ -4642,7 +4642,7 @@
           <p:cNvPr id="7" name="">
             <a:extLst xmlns:a="http://schemas.openxmlformats.org/drawingml/2006/main">
               <a:ext uri="{FF2B5EF4-FFF2-40B4-BE49-F238E27FC236}">
-                <a16:creationId xmlns:a16="http://schemas.microsoft.com/office/drawing/2014/main" id="{E62E20AB-6200-4507-BA0D-C1FC4FD65B60}"/>
+                <a16:creationId xmlns:a16="http://schemas.microsoft.com/office/drawing/2014/main" id="{6AAFDC29-EFC5-491E-BA82-A1A4123BB59C}"/>
               </a:ext>
             </a:extLst>
           </p:cNvPr>
@@ -4674,7 +4674,7 @@
           <p:cNvPr id="8" name="">
             <a:extLst xmlns:a="http://schemas.openxmlformats.org/drawingml/2006/main">
               <a:ext uri="{FF2B5EF4-FFF2-40B4-BE49-F238E27FC236}">
-                <a16:creationId xmlns:a16="http://schemas.microsoft.com/office/drawing/2014/main" id="{C0BCA39D-7FF9-488C-89BE-3F968870CE98}"/>
+                <a16:creationId xmlns:a16="http://schemas.microsoft.com/office/drawing/2014/main" id="{E9BA0E0D-E156-4531-A278-DA1860B0C446}"/>
               </a:ext>
             </a:extLst>
           </p:cNvPr>
@@ -4731,7 +4731,7 @@
           <p:cNvPr id="9" name="">
             <a:extLst xmlns:a="http://schemas.openxmlformats.org/drawingml/2006/main">
               <a:ext uri="{FF2B5EF4-FFF2-40B4-BE49-F238E27FC236}">
-                <a16:creationId xmlns:a16="http://schemas.microsoft.com/office/drawing/2014/main" id="{17C74BAC-D2AF-424B-8E2D-3E986DE54F69}"/>
+                <a16:creationId xmlns:a16="http://schemas.microsoft.com/office/drawing/2014/main" id="{DEB292C9-F077-4A01-A453-D5DB5666BC39}"/>
               </a:ext>
             </a:extLst>
           </p:cNvPr>
@@ -4788,7 +4788,7 @@
           <p:cNvPr id="10" name="">
             <a:extLst xmlns:a="http://schemas.openxmlformats.org/drawingml/2006/main">
               <a:ext uri="{FF2B5EF4-FFF2-40B4-BE49-F238E27FC236}">
-                <a16:creationId xmlns:a16="http://schemas.microsoft.com/office/drawing/2014/main" id="{B3D434C4-8288-4938-AC4C-062DF6322631}"/>
+                <a16:creationId xmlns:a16="http://schemas.microsoft.com/office/drawing/2014/main" id="{6455AFE1-715A-4115-AD0B-B23E1701BE34}"/>
               </a:ext>
             </a:extLst>
           </p:cNvPr>
@@ -4822,7 +4822,7 @@
           <p:cNvPr id="11" name="">
             <a:extLst xmlns:a="http://schemas.openxmlformats.org/drawingml/2006/main">
               <a:ext uri="{FF2B5EF4-FFF2-40B4-BE49-F238E27FC236}">
-                <a16:creationId xmlns:a16="http://schemas.microsoft.com/office/drawing/2014/main" id="{90AC5A87-B026-4DD5-99D7-EEA2D1529BF8}"/>
+                <a16:creationId xmlns:a16="http://schemas.microsoft.com/office/drawing/2014/main" id="{661FE8A8-D3B1-4646-9CB7-8BF0215416B6}"/>
               </a:ext>
             </a:extLst>
           </p:cNvPr>
@@ -4854,7 +4854,7 @@
           <p:cNvPr id="12" name="">
             <a:extLst xmlns:a="http://schemas.openxmlformats.org/drawingml/2006/main">
               <a:ext uri="{FF2B5EF4-FFF2-40B4-BE49-F238E27FC236}">
-                <a16:creationId xmlns:a16="http://schemas.microsoft.com/office/drawing/2014/main" id="{51A67C8C-5562-4A46-BCB5-EA13CEA7211B}"/>
+                <a16:creationId xmlns:a16="http://schemas.microsoft.com/office/drawing/2014/main" id="{E964A4BC-7095-4063-94EE-C19AE4DDF673}"/>
               </a:ext>
             </a:extLst>
           </p:cNvPr>
@@ -4911,7 +4911,7 @@
           <p:cNvPr id="13" name="">
             <a:extLst xmlns:a="http://schemas.openxmlformats.org/drawingml/2006/main">
               <a:ext uri="{FF2B5EF4-FFF2-40B4-BE49-F238E27FC236}">
-                <a16:creationId xmlns:a16="http://schemas.microsoft.com/office/drawing/2014/main" id="{EC92FE6D-D003-4BE5-A98E-0B3C209FACAE}"/>
+                <a16:creationId xmlns:a16="http://schemas.microsoft.com/office/drawing/2014/main" id="{010BE375-FFB0-482B-9636-37384C224ABD}"/>
               </a:ext>
             </a:extLst>
           </p:cNvPr>
@@ -4968,7 +4968,7 @@
           <p:cNvPr id="14" name="">
             <a:extLst xmlns:a="http://schemas.openxmlformats.org/drawingml/2006/main">
               <a:ext uri="{FF2B5EF4-FFF2-40B4-BE49-F238E27FC236}">
-                <a16:creationId xmlns:a16="http://schemas.microsoft.com/office/drawing/2014/main" id="{D168202B-1DA3-43C3-8083-E3354EC06634}"/>
+                <a16:creationId xmlns:a16="http://schemas.microsoft.com/office/drawing/2014/main" id="{62232F3F-A0DC-4B61-9A5A-DA1910556F05}"/>
               </a:ext>
             </a:extLst>
           </p:cNvPr>
@@ -5002,7 +5002,7 @@
           <p:cNvPr id="15" name="">
             <a:extLst xmlns:a="http://schemas.openxmlformats.org/drawingml/2006/main">
               <a:ext uri="{FF2B5EF4-FFF2-40B4-BE49-F238E27FC236}">
-                <a16:creationId xmlns:a16="http://schemas.microsoft.com/office/drawing/2014/main" id="{9DE284C6-63E4-4E73-8820-9BA7BAAB1C69}"/>
+                <a16:creationId xmlns:a16="http://schemas.microsoft.com/office/drawing/2014/main" id="{37A3EF25-BB3A-424E-8D7A-3234B67A72FE}"/>
               </a:ext>
             </a:extLst>
           </p:cNvPr>
@@ -5034,7 +5034,7 @@
           <p:cNvPr id="16" name="">
             <a:extLst xmlns:a="http://schemas.openxmlformats.org/drawingml/2006/main">
               <a:ext uri="{FF2B5EF4-FFF2-40B4-BE49-F238E27FC236}">
-                <a16:creationId xmlns:a16="http://schemas.microsoft.com/office/drawing/2014/main" id="{25B72D1C-6B65-4401-8607-95388B46B203}"/>
+                <a16:creationId xmlns:a16="http://schemas.microsoft.com/office/drawing/2014/main" id="{8C9241AE-D29D-4EC5-9B85-70738321C3F9}"/>
               </a:ext>
             </a:extLst>
           </p:cNvPr>
@@ -5091,7 +5091,7 @@
           <p:cNvPr id="17" name="">
             <a:extLst xmlns:a="http://schemas.openxmlformats.org/drawingml/2006/main">
               <a:ext uri="{FF2B5EF4-FFF2-40B4-BE49-F238E27FC236}">
-                <a16:creationId xmlns:a16="http://schemas.microsoft.com/office/drawing/2014/main" id="{40AF17D3-6E02-49FF-83D0-F296CE706D5A}"/>
+                <a16:creationId xmlns:a16="http://schemas.microsoft.com/office/drawing/2014/main" id="{1C6D0758-2C35-446D-9ECE-A9129350E6C8}"/>
               </a:ext>
             </a:extLst>
           </p:cNvPr>
@@ -5148,7 +5148,7 @@
           <p:cNvPr id="18" name="">
             <a:extLst xmlns:a="http://schemas.openxmlformats.org/drawingml/2006/main">
               <a:ext uri="{FF2B5EF4-FFF2-40B4-BE49-F238E27FC236}">
-                <a16:creationId xmlns:a16="http://schemas.microsoft.com/office/drawing/2014/main" id="{2874956D-87F3-45E5-AABD-AE8D85D30427}"/>
+                <a16:creationId xmlns:a16="http://schemas.microsoft.com/office/drawing/2014/main" id="{094070EA-B00C-4F7B-B83A-76BB58596A7D}"/>
               </a:ext>
             </a:extLst>
           </p:cNvPr>
@@ -5182,7 +5182,7 @@
           <p:cNvPr id="19" name="">
             <a:extLst xmlns:a="http://schemas.openxmlformats.org/drawingml/2006/main">
               <a:ext uri="{FF2B5EF4-FFF2-40B4-BE49-F238E27FC236}">
-                <a16:creationId xmlns:a16="http://schemas.microsoft.com/office/drawing/2014/main" id="{29934C90-6533-4769-8E8F-0D16CEEBC691}"/>
+                <a16:creationId xmlns:a16="http://schemas.microsoft.com/office/drawing/2014/main" id="{849E3A4D-BAD0-4FF1-BB1D-4C9EC83478E4}"/>
               </a:ext>
             </a:extLst>
           </p:cNvPr>
@@ -5214,7 +5214,7 @@
           <p:cNvPr id="20" name="">
             <a:extLst xmlns:a="http://schemas.openxmlformats.org/drawingml/2006/main">
               <a:ext uri="{FF2B5EF4-FFF2-40B4-BE49-F238E27FC236}">
-                <a16:creationId xmlns:a16="http://schemas.microsoft.com/office/drawing/2014/main" id="{C50CB350-C6B4-4BF9-A6AC-4D88C58B1139}"/>
+                <a16:creationId xmlns:a16="http://schemas.microsoft.com/office/drawing/2014/main" id="{B554680A-95CE-464C-AFA6-523492EDEF9D}"/>
               </a:ext>
             </a:extLst>
           </p:cNvPr>
@@ -5271,7 +5271,7 @@
           <p:cNvPr id="21" name="">
             <a:extLst xmlns:a="http://schemas.openxmlformats.org/drawingml/2006/main">
               <a:ext uri="{FF2B5EF4-FFF2-40B4-BE49-F238E27FC236}">
-                <a16:creationId xmlns:a16="http://schemas.microsoft.com/office/drawing/2014/main" id="{8FBE8ACE-ED93-44BD-81A0-55A1C1D2BFC6}"/>
+                <a16:creationId xmlns:a16="http://schemas.microsoft.com/office/drawing/2014/main" id="{ECA8D393-6BF7-4B40-93A6-4672AC51D1F4}"/>
               </a:ext>
             </a:extLst>
           </p:cNvPr>
@@ -5328,7 +5328,7 @@
           <p:cNvPr id="22" name="">
             <a:extLst xmlns:a="http://schemas.openxmlformats.org/drawingml/2006/main">
               <a:ext uri="{FF2B5EF4-FFF2-40B4-BE49-F238E27FC236}">
-                <a16:creationId xmlns:a16="http://schemas.microsoft.com/office/drawing/2014/main" id="{118D5F0C-8306-4314-9942-8E02B172BB6E}"/>
+                <a16:creationId xmlns:a16="http://schemas.microsoft.com/office/drawing/2014/main" id="{32B37B3E-F720-4307-91F7-CAB654F83D6A}"/>
               </a:ext>
             </a:extLst>
           </p:cNvPr>
@@ -5383,7 +5383,7 @@
     </p:spTree>
     <p:extLst>
       <p:ext uri="{BB962C8B-B14F-4D97-AF65-F5344CB8AC3E}">
-        <p14:creationId xmlns:p14="http://schemas.microsoft.com/office/powerpoint/2010/main" val="1519863398"/>
+        <p14:creationId xmlns:p14="http://schemas.microsoft.com/office/powerpoint/2010/main" val="1120588258"/>
       </p:ext>
     </p:extLst>
   </p:cSld>
@@ -5584,7 +5584,7 @@
           <p:cNvPr id="23" name="">
             <a:extLst xmlns:a="http://schemas.openxmlformats.org/drawingml/2006/main">
               <a:ext uri="{FF2B5EF4-FFF2-40B4-BE49-F238E27FC236}">
-                <a16:creationId xmlns:a16="http://schemas.microsoft.com/office/drawing/2014/main" id="{5C7EFA25-C36D-498F-AC3D-C74611324C91}"/>
+                <a16:creationId xmlns:a16="http://schemas.microsoft.com/office/drawing/2014/main" id="{A9690C0B-775E-4011-A54A-34C1D2B70E3E}"/>
               </a:ext>
             </a:extLst>
           </p:cNvPr>
@@ -5616,7 +5616,7 @@
           <p:cNvPr id="2" name="">
             <a:extLst xmlns:a="http://schemas.openxmlformats.org/drawingml/2006/main">
               <a:ext uri="{FF2B5EF4-FFF2-40B4-BE49-F238E27FC236}">
-                <a16:creationId xmlns:a16="http://schemas.microsoft.com/office/drawing/2014/main" id="{817E1972-51A4-4400-82EA-DAF66B1428AB}"/>
+                <a16:creationId xmlns:a16="http://schemas.microsoft.com/office/drawing/2014/main" id="{30B6B5BD-68B2-49EC-B994-DDE5080B4FB4}"/>
               </a:ext>
             </a:extLst>
           </p:cNvPr>
@@ -5673,7 +5673,7 @@
           <p:cNvPr id="3" name="">
             <a:extLst xmlns:a="http://schemas.openxmlformats.org/drawingml/2006/main">
               <a:ext uri="{FF2B5EF4-FFF2-40B4-BE49-F238E27FC236}">
-                <a16:creationId xmlns:a16="http://schemas.microsoft.com/office/drawing/2014/main" id="{D929BBA8-53B6-4D1D-BA98-CAA5ECF94C5E}"/>
+                <a16:creationId xmlns:a16="http://schemas.microsoft.com/office/drawing/2014/main" id="{2DC30EF6-BDCE-4454-930D-999CBB6027AF}"/>
               </a:ext>
             </a:extLst>
           </p:cNvPr>
@@ -5705,7 +5705,7 @@
           <p:cNvPr id="4" name="">
             <a:extLst xmlns:a="http://schemas.openxmlformats.org/drawingml/2006/main">
               <a:ext uri="{FF2B5EF4-FFF2-40B4-BE49-F238E27FC236}">
-                <a16:creationId xmlns:a16="http://schemas.microsoft.com/office/drawing/2014/main" id="{3568C0BF-65E7-4987-BF6A-11730D30EB6E}"/>
+                <a16:creationId xmlns:a16="http://schemas.microsoft.com/office/drawing/2014/main" id="{F4AF451F-6445-4512-9C2A-31B29E90E12F}"/>
               </a:ext>
             </a:extLst>
           </p:cNvPr>
@@ -5762,7 +5762,7 @@
           <p:cNvPr id="5" name="">
             <a:extLst xmlns:a="http://schemas.openxmlformats.org/drawingml/2006/main">
               <a:ext uri="{FF2B5EF4-FFF2-40B4-BE49-F238E27FC236}">
-                <a16:creationId xmlns:a16="http://schemas.microsoft.com/office/drawing/2014/main" id="{7933D887-03A4-42D1-A371-0A1FF7CEDD26}"/>
+                <a16:creationId xmlns:a16="http://schemas.microsoft.com/office/drawing/2014/main" id="{9A8A36C3-0B63-48D4-95A6-31332C070428}"/>
               </a:ext>
             </a:extLst>
           </p:cNvPr>
@@ -5819,7 +5819,7 @@
           <p:cNvPr id="6" name="">
             <a:extLst xmlns:a="http://schemas.openxmlformats.org/drawingml/2006/main">
               <a:ext uri="{FF2B5EF4-FFF2-40B4-BE49-F238E27FC236}">
-                <a16:creationId xmlns:a16="http://schemas.microsoft.com/office/drawing/2014/main" id="{97F61C9A-AEAF-4D11-89CF-9B766A66E5CE}"/>
+                <a16:creationId xmlns:a16="http://schemas.microsoft.com/office/drawing/2014/main" id="{8BA19916-1747-48B6-9B04-F00A622D4EAA}"/>
               </a:ext>
             </a:extLst>
           </p:cNvPr>
@@ -5876,7 +5876,7 @@
           <p:cNvPr id="7" name="">
             <a:extLst xmlns:a="http://schemas.openxmlformats.org/drawingml/2006/main">
               <a:ext uri="{FF2B5EF4-FFF2-40B4-BE49-F238E27FC236}">
-                <a16:creationId xmlns:a16="http://schemas.microsoft.com/office/drawing/2014/main" id="{B8F97A85-F2F9-4310-802E-B876C3153098}"/>
+                <a16:creationId xmlns:a16="http://schemas.microsoft.com/office/drawing/2014/main" id="{98548439-2C9B-4FA0-A303-A9CE68DA067A}"/>
               </a:ext>
             </a:extLst>
           </p:cNvPr>
@@ -5908,7 +5908,7 @@
           <p:cNvPr id="8" name="">
             <a:extLst xmlns:a="http://schemas.openxmlformats.org/drawingml/2006/main">
               <a:ext uri="{FF2B5EF4-FFF2-40B4-BE49-F238E27FC236}">
-                <a16:creationId xmlns:a16="http://schemas.microsoft.com/office/drawing/2014/main" id="{E322EE77-A36B-4F39-A790-CF183041177C}"/>
+                <a16:creationId xmlns:a16="http://schemas.microsoft.com/office/drawing/2014/main" id="{E5DEB8B1-FBE3-4CD4-81A1-7E11E7B29DA0}"/>
               </a:ext>
             </a:extLst>
           </p:cNvPr>
@@ -5965,7 +5965,7 @@
           <p:cNvPr id="9" name="">
             <a:extLst xmlns:a="http://schemas.openxmlformats.org/drawingml/2006/main">
               <a:ext uri="{FF2B5EF4-FFF2-40B4-BE49-F238E27FC236}">
-                <a16:creationId xmlns:a16="http://schemas.microsoft.com/office/drawing/2014/main" id="{2E6D9BCB-BE61-4B3C-A0EE-18D6ECF075F8}"/>
+                <a16:creationId xmlns:a16="http://schemas.microsoft.com/office/drawing/2014/main" id="{161903C4-5FFD-45C4-BF08-2AC2FF104DAF}"/>
               </a:ext>
             </a:extLst>
           </p:cNvPr>
@@ -6022,7 +6022,7 @@
           <p:cNvPr id="10" name="">
             <a:extLst xmlns:a="http://schemas.openxmlformats.org/drawingml/2006/main">
               <a:ext uri="{FF2B5EF4-FFF2-40B4-BE49-F238E27FC236}">
-                <a16:creationId xmlns:a16="http://schemas.microsoft.com/office/drawing/2014/main" id="{F3EF6657-7944-4EDB-A982-F16BCA9841C7}"/>
+                <a16:creationId xmlns:a16="http://schemas.microsoft.com/office/drawing/2014/main" id="{3D722005-E0D6-47BE-8309-642664ACEF51}"/>
               </a:ext>
             </a:extLst>
           </p:cNvPr>
@@ -6056,7 +6056,7 @@
           <p:cNvPr id="11" name="">
             <a:extLst xmlns:a="http://schemas.openxmlformats.org/drawingml/2006/main">
               <a:ext uri="{FF2B5EF4-FFF2-40B4-BE49-F238E27FC236}">
-                <a16:creationId xmlns:a16="http://schemas.microsoft.com/office/drawing/2014/main" id="{EB09B1B8-83AF-4E76-BC1E-3314061573FD}"/>
+                <a16:creationId xmlns:a16="http://schemas.microsoft.com/office/drawing/2014/main" id="{66DB13DA-BDD5-415C-B981-F8080874642F}"/>
               </a:ext>
             </a:extLst>
           </p:cNvPr>
@@ -6088,7 +6088,7 @@
           <p:cNvPr id="12" name="">
             <a:extLst xmlns:a="http://schemas.openxmlformats.org/drawingml/2006/main">
               <a:ext uri="{FF2B5EF4-FFF2-40B4-BE49-F238E27FC236}">
-                <a16:creationId xmlns:a16="http://schemas.microsoft.com/office/drawing/2014/main" id="{CA5EEA68-5F8F-4760-85A5-D025EC028B43}"/>
+                <a16:creationId xmlns:a16="http://schemas.microsoft.com/office/drawing/2014/main" id="{90D1E922-3631-4D82-AF65-77042B841524}"/>
               </a:ext>
             </a:extLst>
           </p:cNvPr>
@@ -6145,7 +6145,7 @@
           <p:cNvPr id="13" name="">
             <a:extLst xmlns:a="http://schemas.openxmlformats.org/drawingml/2006/main">
               <a:ext uri="{FF2B5EF4-FFF2-40B4-BE49-F238E27FC236}">
-                <a16:creationId xmlns:a16="http://schemas.microsoft.com/office/drawing/2014/main" id="{31CEF6B8-9AAB-4218-9BA1-5BA2745A7B04}"/>
+                <a16:creationId xmlns:a16="http://schemas.microsoft.com/office/drawing/2014/main" id="{B9B0E8C8-4BF0-4888-988C-08934155A5BF}"/>
               </a:ext>
             </a:extLst>
           </p:cNvPr>
@@ -6202,7 +6202,7 @@
           <p:cNvPr id="14" name="">
             <a:extLst xmlns:a="http://schemas.openxmlformats.org/drawingml/2006/main">
               <a:ext uri="{FF2B5EF4-FFF2-40B4-BE49-F238E27FC236}">
-                <a16:creationId xmlns:a16="http://schemas.microsoft.com/office/drawing/2014/main" id="{D42A975B-9337-4041-AA36-86FAF378B1CA}"/>
+                <a16:creationId xmlns:a16="http://schemas.microsoft.com/office/drawing/2014/main" id="{55928E90-DE36-479A-816B-2F9277DADCB9}"/>
               </a:ext>
             </a:extLst>
           </p:cNvPr>
@@ -6236,7 +6236,7 @@
           <p:cNvPr id="15" name="">
             <a:extLst xmlns:a="http://schemas.openxmlformats.org/drawingml/2006/main">
               <a:ext uri="{FF2B5EF4-FFF2-40B4-BE49-F238E27FC236}">
-                <a16:creationId xmlns:a16="http://schemas.microsoft.com/office/drawing/2014/main" id="{130D3E76-19FD-459C-96A3-EEEC539EBCEB}"/>
+                <a16:creationId xmlns:a16="http://schemas.microsoft.com/office/drawing/2014/main" id="{44A2BA98-1C3C-4DFB-BCBF-97BAF553DA1B}"/>
               </a:ext>
             </a:extLst>
           </p:cNvPr>
@@ -6268,7 +6268,7 @@
           <p:cNvPr id="16" name="">
             <a:extLst xmlns:a="http://schemas.openxmlformats.org/drawingml/2006/main">
               <a:ext uri="{FF2B5EF4-FFF2-40B4-BE49-F238E27FC236}">
-                <a16:creationId xmlns:a16="http://schemas.microsoft.com/office/drawing/2014/main" id="{4455D047-8EF9-4B23-9AB7-0FCDE21126D1}"/>
+                <a16:creationId xmlns:a16="http://schemas.microsoft.com/office/drawing/2014/main" id="{050CDDC2-2460-4A97-AF1D-353320BB7FB0}"/>
               </a:ext>
             </a:extLst>
           </p:cNvPr>
@@ -6325,7 +6325,7 @@
           <p:cNvPr id="17" name="">
             <a:extLst xmlns:a="http://schemas.openxmlformats.org/drawingml/2006/main">
               <a:ext uri="{FF2B5EF4-FFF2-40B4-BE49-F238E27FC236}">
-                <a16:creationId xmlns:a16="http://schemas.microsoft.com/office/drawing/2014/main" id="{50056368-D1F4-4345-98FF-552AB2292920}"/>
+                <a16:creationId xmlns:a16="http://schemas.microsoft.com/office/drawing/2014/main" id="{2F02E283-3FD1-4305-94E5-25832EBBBABA}"/>
               </a:ext>
             </a:extLst>
           </p:cNvPr>
@@ -6382,7 +6382,7 @@
           <p:cNvPr id="18" name="">
             <a:extLst xmlns:a="http://schemas.openxmlformats.org/drawingml/2006/main">
               <a:ext uri="{FF2B5EF4-FFF2-40B4-BE49-F238E27FC236}">
-                <a16:creationId xmlns:a16="http://schemas.microsoft.com/office/drawing/2014/main" id="{CDD36C3C-24F3-49A5-BD33-DBC0C00A2B0D}"/>
+                <a16:creationId xmlns:a16="http://schemas.microsoft.com/office/drawing/2014/main" id="{CAC4F7F1-010A-43F5-819F-A3F85DFDDD4E}"/>
               </a:ext>
             </a:extLst>
           </p:cNvPr>
@@ -6416,7 +6416,7 @@
           <p:cNvPr id="19" name="">
             <a:extLst xmlns:a="http://schemas.openxmlformats.org/drawingml/2006/main">
               <a:ext uri="{FF2B5EF4-FFF2-40B4-BE49-F238E27FC236}">
-                <a16:creationId xmlns:a16="http://schemas.microsoft.com/office/drawing/2014/main" id="{E3854583-9055-42E7-9AD3-6788A692AD7D}"/>
+                <a16:creationId xmlns:a16="http://schemas.microsoft.com/office/drawing/2014/main" id="{327D638D-3C0E-4DDC-9E83-FD588E06DB5B}"/>
               </a:ext>
             </a:extLst>
           </p:cNvPr>
@@ -6448,7 +6448,7 @@
           <p:cNvPr id="20" name="">
             <a:extLst xmlns:a="http://schemas.openxmlformats.org/drawingml/2006/main">
               <a:ext uri="{FF2B5EF4-FFF2-40B4-BE49-F238E27FC236}">
-                <a16:creationId xmlns:a16="http://schemas.microsoft.com/office/drawing/2014/main" id="{27834D8B-E9C7-4CEB-9DCF-2D4D0FC09484}"/>
+                <a16:creationId xmlns:a16="http://schemas.microsoft.com/office/drawing/2014/main" id="{AEC3AC1E-795F-434B-826C-E37D38C71D84}"/>
               </a:ext>
             </a:extLst>
           </p:cNvPr>
@@ -6505,7 +6505,7 @@
           <p:cNvPr id="21" name="">
             <a:extLst xmlns:a="http://schemas.openxmlformats.org/drawingml/2006/main">
               <a:ext uri="{FF2B5EF4-FFF2-40B4-BE49-F238E27FC236}">
-                <a16:creationId xmlns:a16="http://schemas.microsoft.com/office/drawing/2014/main" id="{20AC62F7-F6DA-4FE4-BDCB-7D48505D239F}"/>
+                <a16:creationId xmlns:a16="http://schemas.microsoft.com/office/drawing/2014/main" id="{A8CD921A-E93D-4BB9-8AD5-95F5D3CECF65}"/>
               </a:ext>
             </a:extLst>
           </p:cNvPr>
@@ -6562,7 +6562,7 @@
           <p:cNvPr id="22" name="">
             <a:extLst xmlns:a="http://schemas.openxmlformats.org/drawingml/2006/main">
               <a:ext uri="{FF2B5EF4-FFF2-40B4-BE49-F238E27FC236}">
-                <a16:creationId xmlns:a16="http://schemas.microsoft.com/office/drawing/2014/main" id="{ED0805EF-CCE5-4521-82BD-8ABF60F8952C}"/>
+                <a16:creationId xmlns:a16="http://schemas.microsoft.com/office/drawing/2014/main" id="{4AC2F35A-F819-4A90-961F-22D2E65138AD}"/>
               </a:ext>
             </a:extLst>
           </p:cNvPr>
@@ -6617,7 +6617,7 @@
     </p:spTree>
     <p:extLst>
       <p:ext uri="{BB962C8B-B14F-4D97-AF65-F5344CB8AC3E}">
-        <p14:creationId xmlns:p14="http://schemas.microsoft.com/office/powerpoint/2010/main" val="451896251"/>
+        <p14:creationId xmlns:p14="http://schemas.microsoft.com/office/powerpoint/2010/main" val="317977348"/>
       </p:ext>
     </p:extLst>
   </p:cSld>
@@ -6818,7 +6818,7 @@
           <p:cNvPr id="16" name="">
             <a:extLst xmlns:a="http://schemas.openxmlformats.org/drawingml/2006/main">
               <a:ext uri="{FF2B5EF4-FFF2-40B4-BE49-F238E27FC236}">
-                <a16:creationId xmlns:a16="http://schemas.microsoft.com/office/drawing/2014/main" id="{7B8E487F-83D0-45D2-BA2B-61B18F760405}"/>
+                <a16:creationId xmlns:a16="http://schemas.microsoft.com/office/drawing/2014/main" id="{4BC9A379-74E1-4873-BA3A-C2845CE4C474}"/>
               </a:ext>
             </a:extLst>
           </p:cNvPr>
@@ -6850,7 +6850,7 @@
           <p:cNvPr id="2" name="">
             <a:extLst xmlns:a="http://schemas.openxmlformats.org/drawingml/2006/main">
               <a:ext uri="{FF2B5EF4-FFF2-40B4-BE49-F238E27FC236}">
-                <a16:creationId xmlns:a16="http://schemas.microsoft.com/office/drawing/2014/main" id="{F692C6EF-ECB8-44A9-92BC-9A644B4A73E4}"/>
+                <a16:creationId xmlns:a16="http://schemas.microsoft.com/office/drawing/2014/main" id="{2E83F062-C075-402A-AC3B-2501D06DF706}"/>
               </a:ext>
             </a:extLst>
           </p:cNvPr>
@@ -6907,7 +6907,7 @@
           <p:cNvPr id="3" name="">
             <a:extLst xmlns:a="http://schemas.openxmlformats.org/drawingml/2006/main">
               <a:ext uri="{FF2B5EF4-FFF2-40B4-BE49-F238E27FC236}">
-                <a16:creationId xmlns:a16="http://schemas.microsoft.com/office/drawing/2014/main" id="{2D24386F-D1B1-48A1-A5D0-26C7BD116694}"/>
+                <a16:creationId xmlns:a16="http://schemas.microsoft.com/office/drawing/2014/main" id="{763BF079-2915-49FC-8066-B00EBFD75BA9}"/>
               </a:ext>
             </a:extLst>
           </p:cNvPr>
@@ -6939,7 +6939,7 @@
           <p:cNvPr id="4" name="">
             <a:extLst xmlns:a="http://schemas.openxmlformats.org/drawingml/2006/main">
               <a:ext uri="{FF2B5EF4-FFF2-40B4-BE49-F238E27FC236}">
-                <a16:creationId xmlns:a16="http://schemas.microsoft.com/office/drawing/2014/main" id="{6E307E58-5D87-4601-92F7-B6B713815E0A}"/>
+                <a16:creationId xmlns:a16="http://schemas.microsoft.com/office/drawing/2014/main" id="{37E549CE-AAC8-423B-9499-E482F542E746}"/>
               </a:ext>
             </a:extLst>
           </p:cNvPr>
@@ -6996,7 +6996,7 @@
           <p:cNvPr id="5" name="">
             <a:extLst xmlns:a="http://schemas.openxmlformats.org/drawingml/2006/main">
               <a:ext uri="{FF2B5EF4-FFF2-40B4-BE49-F238E27FC236}">
-                <a16:creationId xmlns:a16="http://schemas.microsoft.com/office/drawing/2014/main" id="{2ED96B69-B6B4-4DDE-88F0-6122688D8D9A}"/>
+                <a16:creationId xmlns:a16="http://schemas.microsoft.com/office/drawing/2014/main" id="{5F6699B2-30EB-4E36-B9E9-FCB380409633}"/>
               </a:ext>
             </a:extLst>
           </p:cNvPr>
@@ -7053,7 +7053,7 @@
           <p:cNvPr id="6" name="">
             <a:extLst xmlns:a="http://schemas.openxmlformats.org/drawingml/2006/main">
               <a:ext uri="{FF2B5EF4-FFF2-40B4-BE49-F238E27FC236}">
-                <a16:creationId xmlns:a16="http://schemas.microsoft.com/office/drawing/2014/main" id="{B64D25D6-62C4-4661-8ADE-BAED878B3A98}"/>
+                <a16:creationId xmlns:a16="http://schemas.microsoft.com/office/drawing/2014/main" id="{B5504093-55B2-476E-9BBF-21A879B16D21}"/>
               </a:ext>
             </a:extLst>
           </p:cNvPr>
@@ -7110,7 +7110,7 @@
           <p:cNvPr id="7" name="">
             <a:extLst xmlns:a="http://schemas.openxmlformats.org/drawingml/2006/main">
               <a:ext uri="{FF2B5EF4-FFF2-40B4-BE49-F238E27FC236}">
-                <a16:creationId xmlns:a16="http://schemas.microsoft.com/office/drawing/2014/main" id="{F8826BA6-10DD-44B3-9811-FD52301A91B8}"/>
+                <a16:creationId xmlns:a16="http://schemas.microsoft.com/office/drawing/2014/main" id="{3319D3FD-88DD-4AA3-B02A-65B5ED15FEC6}"/>
               </a:ext>
             </a:extLst>
           </p:cNvPr>
@@ -7142,7 +7142,7 @@
           <p:cNvPr id="8" name="">
             <a:extLst xmlns:a="http://schemas.openxmlformats.org/drawingml/2006/main">
               <a:ext uri="{FF2B5EF4-FFF2-40B4-BE49-F238E27FC236}">
-                <a16:creationId xmlns:a16="http://schemas.microsoft.com/office/drawing/2014/main" id="{73E6B441-5E07-45FD-89A1-AE3DE46D842D}"/>
+                <a16:creationId xmlns:a16="http://schemas.microsoft.com/office/drawing/2014/main" id="{B20B71D6-4B40-45DD-B628-F8EED22965ED}"/>
               </a:ext>
             </a:extLst>
           </p:cNvPr>
@@ -7199,7 +7199,7 @@
           <p:cNvPr id="9" name="">
             <a:extLst xmlns:a="http://schemas.openxmlformats.org/drawingml/2006/main">
               <a:ext uri="{FF2B5EF4-FFF2-40B4-BE49-F238E27FC236}">
-                <a16:creationId xmlns:a16="http://schemas.microsoft.com/office/drawing/2014/main" id="{91F0BB2B-CBEB-4BF1-84FF-74362E407D5C}"/>
+                <a16:creationId xmlns:a16="http://schemas.microsoft.com/office/drawing/2014/main" id="{58FA58CE-06E7-4B1D-AE81-A5BA5295D9AD}"/>
               </a:ext>
             </a:extLst>
           </p:cNvPr>
@@ -7256,7 +7256,7 @@
           <p:cNvPr id="10" name="">
             <a:extLst xmlns:a="http://schemas.openxmlformats.org/drawingml/2006/main">
               <a:ext uri="{FF2B5EF4-FFF2-40B4-BE49-F238E27FC236}">
-                <a16:creationId xmlns:a16="http://schemas.microsoft.com/office/drawing/2014/main" id="{42D33FA6-7309-4203-8262-A915EA668BC9}"/>
+                <a16:creationId xmlns:a16="http://schemas.microsoft.com/office/drawing/2014/main" id="{3AD14DEA-4A89-4155-9F70-588D4B1F767C}"/>
               </a:ext>
             </a:extLst>
           </p:cNvPr>
@@ -7313,7 +7313,7 @@
           <p:cNvPr id="11" name="">
             <a:extLst xmlns:a="http://schemas.openxmlformats.org/drawingml/2006/main">
               <a:ext uri="{FF2B5EF4-FFF2-40B4-BE49-F238E27FC236}">
-                <a16:creationId xmlns:a16="http://schemas.microsoft.com/office/drawing/2014/main" id="{530500B3-4A46-4C75-BD11-1E841A5622D6}"/>
+                <a16:creationId xmlns:a16="http://schemas.microsoft.com/office/drawing/2014/main" id="{AC848726-78F8-4C30-B3DA-27F5F9AA4F9C}"/>
               </a:ext>
             </a:extLst>
           </p:cNvPr>
@@ -7345,7 +7345,7 @@
           <p:cNvPr id="12" name="">
             <a:extLst xmlns:a="http://schemas.openxmlformats.org/drawingml/2006/main">
               <a:ext uri="{FF2B5EF4-FFF2-40B4-BE49-F238E27FC236}">
-                <a16:creationId xmlns:a16="http://schemas.microsoft.com/office/drawing/2014/main" id="{065D76BD-0CBB-4F75-8B46-A4D937EB59EB}"/>
+                <a16:creationId xmlns:a16="http://schemas.microsoft.com/office/drawing/2014/main" id="{BEAEC52E-3BC3-41BE-904D-0A3AD4758EB9}"/>
               </a:ext>
             </a:extLst>
           </p:cNvPr>
@@ -7402,7 +7402,7 @@
           <p:cNvPr id="13" name="">
             <a:extLst xmlns:a="http://schemas.openxmlformats.org/drawingml/2006/main">
               <a:ext uri="{FF2B5EF4-FFF2-40B4-BE49-F238E27FC236}">
-                <a16:creationId xmlns:a16="http://schemas.microsoft.com/office/drawing/2014/main" id="{2930853F-5AEB-433A-B103-B8E62C4903BF}"/>
+                <a16:creationId xmlns:a16="http://schemas.microsoft.com/office/drawing/2014/main" id="{BA2C3866-DA64-49D8-B13C-760D79283413}"/>
               </a:ext>
             </a:extLst>
           </p:cNvPr>
@@ -7459,7 +7459,7 @@
           <p:cNvPr id="14" name="">
             <a:extLst xmlns:a="http://schemas.openxmlformats.org/drawingml/2006/main">
               <a:ext uri="{FF2B5EF4-FFF2-40B4-BE49-F238E27FC236}">
-                <a16:creationId xmlns:a16="http://schemas.microsoft.com/office/drawing/2014/main" id="{273EEB2A-F695-497F-802A-AF8A0425C1B7}"/>
+                <a16:creationId xmlns:a16="http://schemas.microsoft.com/office/drawing/2014/main" id="{B72E8DAF-5A55-4B40-90CF-840F285E2315}"/>
               </a:ext>
             </a:extLst>
           </p:cNvPr>
@@ -7516,7 +7516,7 @@
           <p:cNvPr id="15" name="">
             <a:extLst xmlns:a="http://schemas.openxmlformats.org/drawingml/2006/main">
               <a:ext uri="{FF2B5EF4-FFF2-40B4-BE49-F238E27FC236}">
-                <a16:creationId xmlns:a16="http://schemas.microsoft.com/office/drawing/2014/main" id="{7305CF46-E282-4BE9-9D91-EE4A024B5433}"/>
+                <a16:creationId xmlns:a16="http://schemas.microsoft.com/office/drawing/2014/main" id="{77F537D5-4440-4BD4-99C0-CCA71A397A79}"/>
               </a:ext>
             </a:extLst>
           </p:cNvPr>
@@ -7571,7 +7571,7 @@
     </p:spTree>
     <p:extLst>
       <p:ext uri="{BB962C8B-B14F-4D97-AF65-F5344CB8AC3E}">
-        <p14:creationId xmlns:p14="http://schemas.microsoft.com/office/powerpoint/2010/main" val="338008496"/>
+        <p14:creationId xmlns:p14="http://schemas.microsoft.com/office/powerpoint/2010/main" val="437225245"/>
       </p:ext>
     </p:extLst>
   </p:cSld>
@@ -7772,7 +7772,7 @@
           <p:cNvPr id="23" name="">
             <a:extLst xmlns:a="http://schemas.openxmlformats.org/drawingml/2006/main">
               <a:ext uri="{FF2B5EF4-FFF2-40B4-BE49-F238E27FC236}">
-                <a16:creationId xmlns:a16="http://schemas.microsoft.com/office/drawing/2014/main" id="{8E9E0E8D-AAA1-4EC0-AEDF-6CC6F152CBF1}"/>
+                <a16:creationId xmlns:a16="http://schemas.microsoft.com/office/drawing/2014/main" id="{4D4225B9-07DF-4E50-B83F-8FB06C3714E3}"/>
               </a:ext>
             </a:extLst>
           </p:cNvPr>
@@ -7804,7 +7804,7 @@
           <p:cNvPr id="2" name="">
             <a:extLst xmlns:a="http://schemas.openxmlformats.org/drawingml/2006/main">
               <a:ext uri="{FF2B5EF4-FFF2-40B4-BE49-F238E27FC236}">
-                <a16:creationId xmlns:a16="http://schemas.microsoft.com/office/drawing/2014/main" id="{F458527B-1970-4FC8-84AA-A530B1535DD2}"/>
+                <a16:creationId xmlns:a16="http://schemas.microsoft.com/office/drawing/2014/main" id="{4F7F19D3-2BE8-451F-B0B7-FB1C4D846D99}"/>
               </a:ext>
             </a:extLst>
           </p:cNvPr>
@@ -7861,7 +7861,7 @@
           <p:cNvPr id="3" name="">
             <a:extLst xmlns:a="http://schemas.openxmlformats.org/drawingml/2006/main">
               <a:ext uri="{FF2B5EF4-FFF2-40B4-BE49-F238E27FC236}">
-                <a16:creationId xmlns:a16="http://schemas.microsoft.com/office/drawing/2014/main" id="{7A7B3FE0-7128-437A-B9F0-449B7DFD4C0C}"/>
+                <a16:creationId xmlns:a16="http://schemas.microsoft.com/office/drawing/2014/main" id="{E350D934-1B82-4091-95C5-952C546A5569}"/>
               </a:ext>
             </a:extLst>
           </p:cNvPr>
@@ -7893,7 +7893,7 @@
           <p:cNvPr id="4" name="">
             <a:extLst xmlns:a="http://schemas.openxmlformats.org/drawingml/2006/main">
               <a:ext uri="{FF2B5EF4-FFF2-40B4-BE49-F238E27FC236}">
-                <a16:creationId xmlns:a16="http://schemas.microsoft.com/office/drawing/2014/main" id="{31E8ED25-B42B-46FF-ADFC-9F05849F53E1}"/>
+                <a16:creationId xmlns:a16="http://schemas.microsoft.com/office/drawing/2014/main" id="{66D990AF-815D-48DE-BE54-5F0CF6A4D1E9}"/>
               </a:ext>
             </a:extLst>
           </p:cNvPr>
@@ -7950,7 +7950,7 @@
           <p:cNvPr id="5" name="">
             <a:extLst xmlns:a="http://schemas.openxmlformats.org/drawingml/2006/main">
               <a:ext uri="{FF2B5EF4-FFF2-40B4-BE49-F238E27FC236}">
-                <a16:creationId xmlns:a16="http://schemas.microsoft.com/office/drawing/2014/main" id="{A297F7B8-875B-414E-975C-6BEE9B0A9A0C}"/>
+                <a16:creationId xmlns:a16="http://schemas.microsoft.com/office/drawing/2014/main" id="{07363C01-A1EE-4B82-A8A5-2211D906BC5F}"/>
               </a:ext>
             </a:extLst>
           </p:cNvPr>
@@ -8007,7 +8007,7 @@
           <p:cNvPr id="6" name="">
             <a:extLst xmlns:a="http://schemas.openxmlformats.org/drawingml/2006/main">
               <a:ext uri="{FF2B5EF4-FFF2-40B4-BE49-F238E27FC236}">
-                <a16:creationId xmlns:a16="http://schemas.microsoft.com/office/drawing/2014/main" id="{0574BBC0-DBDE-409E-B4F5-5138DA11DE55}"/>
+                <a16:creationId xmlns:a16="http://schemas.microsoft.com/office/drawing/2014/main" id="{C948F622-17FC-4502-B47F-EFA08EC50CDF}"/>
               </a:ext>
             </a:extLst>
           </p:cNvPr>
@@ -8064,7 +8064,7 @@
           <p:cNvPr id="7" name="">
             <a:extLst xmlns:a="http://schemas.openxmlformats.org/drawingml/2006/main">
               <a:ext uri="{FF2B5EF4-FFF2-40B4-BE49-F238E27FC236}">
-                <a16:creationId xmlns:a16="http://schemas.microsoft.com/office/drawing/2014/main" id="{FB0C6DD9-CA18-48ED-8935-46F9E8A6E6CF}"/>
+                <a16:creationId xmlns:a16="http://schemas.microsoft.com/office/drawing/2014/main" id="{B361D834-B960-464F-BB5F-9739433EED4C}"/>
               </a:ext>
             </a:extLst>
           </p:cNvPr>
@@ -8096,7 +8096,7 @@
           <p:cNvPr id="8" name="">
             <a:extLst xmlns:a="http://schemas.openxmlformats.org/drawingml/2006/main">
               <a:ext uri="{FF2B5EF4-FFF2-40B4-BE49-F238E27FC236}">
-                <a16:creationId xmlns:a16="http://schemas.microsoft.com/office/drawing/2014/main" id="{FEAF015C-B2AE-458E-9034-AC2440DF36DC}"/>
+                <a16:creationId xmlns:a16="http://schemas.microsoft.com/office/drawing/2014/main" id="{BDAFF024-FC6C-4830-8FCC-DC48B89FB0CC}"/>
               </a:ext>
             </a:extLst>
           </p:cNvPr>
@@ -8153,7 +8153,7 @@
           <p:cNvPr id="9" name="">
             <a:extLst xmlns:a="http://schemas.openxmlformats.org/drawingml/2006/main">
               <a:ext uri="{FF2B5EF4-FFF2-40B4-BE49-F238E27FC236}">
-                <a16:creationId xmlns:a16="http://schemas.microsoft.com/office/drawing/2014/main" id="{E30523BD-F4EA-4AD6-9606-FF0DB89F2AC7}"/>
+                <a16:creationId xmlns:a16="http://schemas.microsoft.com/office/drawing/2014/main" id="{2A5F3FA4-5F4C-4C20-AA32-5AEB69CF87A9}"/>
               </a:ext>
             </a:extLst>
           </p:cNvPr>
@@ -8210,19 +8210,19 @@
           <p:cNvPr id="10" name="">
             <a:extLst xmlns:a="http://schemas.openxmlformats.org/drawingml/2006/main">
               <a:ext uri="{FF2B5EF4-FFF2-40B4-BE49-F238E27FC236}">
-                <a16:creationId xmlns:a16="http://schemas.microsoft.com/office/drawing/2014/main" id="{71D22AA6-6F4A-4C3C-A533-F599D792E981}"/>
-              </a:ext>
-            </a:extLst>
-          </p:cNvPr>
-          <p:cNvSpPr>
-            <a:spLocks xmlns:a="http://schemas.openxmlformats.org/drawingml/2006/main" noGrp="1"/>
-          </p:cNvSpPr>
-          <p:nvPr/>
-        </p:nvSpPr>
-        <p:spPr>
-          <a:xfrm xmlns:a="http://schemas.openxmlformats.org/drawingml/2006/main">
-            <a:off x="914400" y="1257300"/>
-            <a:ext cx="10363200" cy="781050"/>
+                <a16:creationId xmlns:a16="http://schemas.microsoft.com/office/drawing/2014/main" id="{29B848C0-7AE3-4E65-8CE1-44CE20D61EF6}"/>
+              </a:ext>
+            </a:extLst>
+          </p:cNvPr>
+          <p:cNvSpPr>
+            <a:spLocks xmlns:a="http://schemas.openxmlformats.org/drawingml/2006/main" noGrp="1"/>
+          </p:cNvSpPr>
+          <p:nvPr/>
+        </p:nvSpPr>
+        <p:spPr>
+          <a:xfrm xmlns:a="http://schemas.openxmlformats.org/drawingml/2006/main">
+            <a:off x="857250" y="1219200"/>
+            <a:ext cx="10477500" cy="742950"/>
           </a:xfrm>
           <a:prstGeom xmlns:a="http://schemas.openxmlformats.org/drawingml/2006/main" prst="rect">
             <a:avLst/>
@@ -8239,7 +8239,7 @@
           <a:lstStyle xmlns:a="http://schemas.openxmlformats.org/drawingml/2006/main"/>
           <a:p xmlns:a="http://schemas.openxmlformats.org/drawingml/2006/main">
             <a:pPr algn="ctr">
-              <a:defRPr sz="2175" b="1">
+              <a:defRPr sz="2100" b="1">
                 <a:solidFill>
                   <a:srgbClr val="17253A"/>
                 </a:solidFill>
@@ -8249,7 +8249,7 @@
               </a:defRPr>
             </a:pPr>
             <a:r>
-              <a:rPr sz="2175" b="1">
+              <a:rPr sz="2100" b="1">
                 <a:solidFill>
                   <a:srgbClr val="17253A"/>
                 </a:solidFill>
@@ -8267,28 +8267,30 @@
           <p:cNvPr id="11" name="">
             <a:extLst xmlns:a="http://schemas.openxmlformats.org/drawingml/2006/main">
               <a:ext uri="{FF2B5EF4-FFF2-40B4-BE49-F238E27FC236}">
-                <a16:creationId xmlns:a16="http://schemas.microsoft.com/office/drawing/2014/main" id="{7A42EA80-63C4-4556-9E19-E55027F97538}"/>
-              </a:ext>
-            </a:extLst>
-          </p:cNvPr>
-          <p:cNvSpPr>
-            <a:spLocks xmlns:a="http://schemas.openxmlformats.org/drawingml/2006/main" noGrp="1"/>
-          </p:cNvSpPr>
-          <p:nvPr/>
-        </p:nvSpPr>
-        <p:spPr>
-          <a:xfrm xmlns:a="http://schemas.openxmlformats.org/drawingml/2006/main">
-            <a:off x="1000125" y="2247900"/>
-            <a:ext cx="476250" cy="476250"/>
-          </a:xfrm>
-          <a:prstGeom xmlns:a="http://schemas.openxmlformats.org/drawingml/2006/main" prst="ellipse">
+                <a16:creationId xmlns:a16="http://schemas.microsoft.com/office/drawing/2014/main" id="{F81F9485-4E86-4BE3-B304-B9125109FF3C}"/>
+              </a:ext>
+            </a:extLst>
+          </p:cNvPr>
+          <p:cNvSpPr>
+            <a:spLocks xmlns:a="http://schemas.openxmlformats.org/drawingml/2006/main" noGrp="1"/>
+          </p:cNvSpPr>
+          <p:nvPr/>
+        </p:nvSpPr>
+        <p:spPr>
+          <a:xfrm xmlns:a="http://schemas.openxmlformats.org/drawingml/2006/main">
+            <a:off x="971550" y="2124075"/>
+            <a:ext cx="38100" cy="3524250"/>
+          </a:xfrm>
+          <a:prstGeom xmlns:a="http://schemas.openxmlformats.org/drawingml/2006/main" prst="rect">
             <a:avLst/>
           </a:prstGeom>
           <a:solidFill xmlns:a="http://schemas.openxmlformats.org/drawingml/2006/main">
-            <a:srgbClr val="18324A"/>
+            <a:srgbClr val="2C6E73"/>
           </a:solidFill>
           <a:ln xmlns:a="http://schemas.openxmlformats.org/drawingml/2006/main" w="0">
-            <a:noFill/>
+            <a:solidFill>
+              <a:srgbClr val="2C6E73"/>
+            </a:solidFill>
           </a:ln>
         </p:spPr>
       </p:sp>
@@ -8297,19 +8299,19 @@
           <p:cNvPr id="12" name="">
             <a:extLst xmlns:a="http://schemas.openxmlformats.org/drawingml/2006/main">
               <a:ext uri="{FF2B5EF4-FFF2-40B4-BE49-F238E27FC236}">
-                <a16:creationId xmlns:a16="http://schemas.microsoft.com/office/drawing/2014/main" id="{D8B104EF-95CD-477C-9504-BABACF2C1067}"/>
-              </a:ext>
-            </a:extLst>
-          </p:cNvPr>
-          <p:cNvSpPr>
-            <a:spLocks xmlns:a="http://schemas.openxmlformats.org/drawingml/2006/main" noGrp="1"/>
-          </p:cNvSpPr>
-          <p:nvPr/>
-        </p:nvSpPr>
-        <p:spPr>
-          <a:xfrm xmlns:a="http://schemas.openxmlformats.org/drawingml/2006/main">
-            <a:off x="1000125" y="2276475"/>
-            <a:ext cx="476250" cy="419100"/>
+                <a16:creationId xmlns:a16="http://schemas.microsoft.com/office/drawing/2014/main" id="{D297DE2C-5A21-4554-91C8-04D767706C74}"/>
+              </a:ext>
+            </a:extLst>
+          </p:cNvPr>
+          <p:cNvSpPr>
+            <a:spLocks xmlns:a="http://schemas.openxmlformats.org/drawingml/2006/main" noGrp="1"/>
+          </p:cNvSpPr>
+          <p:nvPr/>
+        </p:nvSpPr>
+        <p:spPr>
+          <a:xfrm xmlns:a="http://schemas.openxmlformats.org/drawingml/2006/main">
+            <a:off x="1162050" y="2200275"/>
+            <a:ext cx="400050" cy="400050"/>
           </a:xfrm>
           <a:prstGeom xmlns:a="http://schemas.openxmlformats.org/drawingml/2006/main" prst="rect">
             <a:avLst/>
@@ -8326,9 +8328,9 @@
           <a:lstStyle xmlns:a="http://schemas.openxmlformats.org/drawingml/2006/main"/>
           <a:p xmlns:a="http://schemas.openxmlformats.org/drawingml/2006/main">
             <a:pPr algn="ctr">
-              <a:defRPr sz="1350" b="1">
-                <a:solidFill>
-                  <a:srgbClr val="FFFFFF"/>
+              <a:defRPr sz="1125" b="1">
+                <a:solidFill>
+                  <a:srgbClr val="2C6E73"/>
                 </a:solidFill>
                 <a:latin typeface="Arial"/>
                 <a:ea typeface="Arial"/>
@@ -8336,9 +8338,9 @@
               </a:defRPr>
             </a:pPr>
             <a:r>
-              <a:rPr sz="1350" b="1">
-                <a:solidFill>
-                  <a:srgbClr val="FFFFFF"/>
+              <a:rPr sz="1125" b="1">
+                <a:solidFill>
+                  <a:srgbClr val="2C6E73"/>
                 </a:solidFill>
                 <a:latin typeface="Arial"/>
                 <a:ea typeface="Arial"/>
@@ -8354,19 +8356,19 @@
           <p:cNvPr id="13" name="">
             <a:extLst xmlns:a="http://schemas.openxmlformats.org/drawingml/2006/main">
               <a:ext uri="{FF2B5EF4-FFF2-40B4-BE49-F238E27FC236}">
-                <a16:creationId xmlns:a16="http://schemas.microsoft.com/office/drawing/2014/main" id="{0A0ED1B5-F279-4CB5-9B85-640731B77A74}"/>
-              </a:ext>
-            </a:extLst>
-          </p:cNvPr>
-          <p:cNvSpPr>
-            <a:spLocks xmlns:a="http://schemas.openxmlformats.org/drawingml/2006/main" noGrp="1"/>
-          </p:cNvSpPr>
-          <p:nvPr/>
-        </p:nvSpPr>
-        <p:spPr>
-          <a:xfrm xmlns:a="http://schemas.openxmlformats.org/drawingml/2006/main">
-            <a:off x="1714500" y="2181225"/>
-            <a:ext cx="9429750" cy="609600"/>
+                <a16:creationId xmlns:a16="http://schemas.microsoft.com/office/drawing/2014/main" id="{5B6ACFEA-2738-4B1B-9C33-1D6E92622FCA}"/>
+              </a:ext>
+            </a:extLst>
+          </p:cNvPr>
+          <p:cNvSpPr>
+            <a:spLocks xmlns:a="http://schemas.openxmlformats.org/drawingml/2006/main" noGrp="1"/>
+          </p:cNvSpPr>
+          <p:nvPr/>
+        </p:nvSpPr>
+        <p:spPr>
+          <a:xfrm xmlns:a="http://schemas.openxmlformats.org/drawingml/2006/main">
+            <a:off x="1714500" y="2114550"/>
+            <a:ext cx="9525000" cy="809625"/>
           </a:xfrm>
           <a:prstGeom xmlns:a="http://schemas.openxmlformats.org/drawingml/2006/main" prst="rect">
             <a:avLst/>
@@ -8383,7 +8385,7 @@
           <a:lstStyle xmlns:a="http://schemas.openxmlformats.org/drawingml/2006/main"/>
           <a:p xmlns:a="http://schemas.openxmlformats.org/drawingml/2006/main">
             <a:pPr algn="l">
-              <a:defRPr sz="1500" b="0">
+              <a:defRPr sz="1725" b="0">
                 <a:solidFill>
                   <a:srgbClr val="17253A"/>
                 </a:solidFill>
@@ -8393,7 +8395,7 @@
               </a:defRPr>
             </a:pPr>
             <a:r>
-              <a:rPr sz="1500" b="0">
+              <a:rPr sz="1725" b="0">
                 <a:solidFill>
                   <a:srgbClr val="17253A"/>
                 </a:solidFill>
@@ -8401,7 +8403,7 @@
                 <a:ea typeface="Arial"/>
                 <a:cs typeface="Arial"/>
               </a:rPr>
-              <a:t>Identify the structure: Underline the place named in the question.</a:t>
+              <a:t>398,742 → 400,000</a:t>
             </a:r>
           </a:p>
         </p:txBody>
@@ -8411,28 +8413,30 @@
           <p:cNvPr id="14" name="">
             <a:extLst xmlns:a="http://schemas.openxmlformats.org/drawingml/2006/main">
               <a:ext uri="{FF2B5EF4-FFF2-40B4-BE49-F238E27FC236}">
-                <a16:creationId xmlns:a16="http://schemas.microsoft.com/office/drawing/2014/main" id="{2344E0C8-E198-4B9A-AE27-2C3E7D8F1B18}"/>
-              </a:ext>
-            </a:extLst>
-          </p:cNvPr>
-          <p:cNvSpPr>
-            <a:spLocks xmlns:a="http://schemas.openxmlformats.org/drawingml/2006/main" noGrp="1"/>
-          </p:cNvSpPr>
-          <p:nvPr/>
-        </p:nvSpPr>
-        <p:spPr>
-          <a:xfrm xmlns:a="http://schemas.openxmlformats.org/drawingml/2006/main">
-            <a:off x="1000125" y="2990850"/>
-            <a:ext cx="476250" cy="476250"/>
-          </a:xfrm>
-          <a:prstGeom xmlns:a="http://schemas.openxmlformats.org/drawingml/2006/main" prst="ellipse">
+                <a16:creationId xmlns:a16="http://schemas.microsoft.com/office/drawing/2014/main" id="{C80F2A86-C01A-45A8-A4F2-E81E89824E23}"/>
+              </a:ext>
+            </a:extLst>
+          </p:cNvPr>
+          <p:cNvSpPr>
+            <a:spLocks xmlns:a="http://schemas.openxmlformats.org/drawingml/2006/main" noGrp="1"/>
+          </p:cNvSpPr>
+          <p:nvPr/>
+        </p:nvSpPr>
+        <p:spPr>
+          <a:xfrm xmlns:a="http://schemas.openxmlformats.org/drawingml/2006/main">
+            <a:off x="1714500" y="2943225"/>
+            <a:ext cx="9334500" cy="9525"/>
+          </a:xfrm>
+          <a:prstGeom xmlns:a="http://schemas.openxmlformats.org/drawingml/2006/main" prst="rect">
             <a:avLst/>
           </a:prstGeom>
           <a:solidFill xmlns:a="http://schemas.openxmlformats.org/drawingml/2006/main">
-            <a:srgbClr val="2C6E73"/>
+            <a:srgbClr val="D9E0E6"/>
           </a:solidFill>
           <a:ln xmlns:a="http://schemas.openxmlformats.org/drawingml/2006/main" w="0">
-            <a:noFill/>
+            <a:solidFill>
+              <a:srgbClr val="D9E0E6"/>
+            </a:solidFill>
           </a:ln>
         </p:spPr>
       </p:sp>
@@ -8441,19 +8445,19 @@
           <p:cNvPr id="15" name="">
             <a:extLst xmlns:a="http://schemas.openxmlformats.org/drawingml/2006/main">
               <a:ext uri="{FF2B5EF4-FFF2-40B4-BE49-F238E27FC236}">
-                <a16:creationId xmlns:a16="http://schemas.microsoft.com/office/drawing/2014/main" id="{B772280C-130B-4CE8-8FA3-0B9E947F85EA}"/>
-              </a:ext>
-            </a:extLst>
-          </p:cNvPr>
-          <p:cNvSpPr>
-            <a:spLocks xmlns:a="http://schemas.openxmlformats.org/drawingml/2006/main" noGrp="1"/>
-          </p:cNvSpPr>
-          <p:nvPr/>
-        </p:nvSpPr>
-        <p:spPr>
-          <a:xfrm xmlns:a="http://schemas.openxmlformats.org/drawingml/2006/main">
-            <a:off x="1000125" y="3019425"/>
-            <a:ext cx="476250" cy="419100"/>
+                <a16:creationId xmlns:a16="http://schemas.microsoft.com/office/drawing/2014/main" id="{C04B01F2-761A-42ED-86EC-64EA7869D18F}"/>
+              </a:ext>
+            </a:extLst>
+          </p:cNvPr>
+          <p:cNvSpPr>
+            <a:spLocks xmlns:a="http://schemas.openxmlformats.org/drawingml/2006/main" noGrp="1"/>
+          </p:cNvSpPr>
+          <p:nvPr/>
+        </p:nvSpPr>
+        <p:spPr>
+          <a:xfrm xmlns:a="http://schemas.openxmlformats.org/drawingml/2006/main">
+            <a:off x="1162050" y="3076575"/>
+            <a:ext cx="400050" cy="400050"/>
           </a:xfrm>
           <a:prstGeom xmlns:a="http://schemas.openxmlformats.org/drawingml/2006/main" prst="rect">
             <a:avLst/>
@@ -8470,9 +8474,9 @@
           <a:lstStyle xmlns:a="http://schemas.openxmlformats.org/drawingml/2006/main"/>
           <a:p xmlns:a="http://schemas.openxmlformats.org/drawingml/2006/main">
             <a:pPr algn="ctr">
-              <a:defRPr sz="1350" b="1">
-                <a:solidFill>
-                  <a:srgbClr val="FFFFFF"/>
+              <a:defRPr sz="1125" b="1">
+                <a:solidFill>
+                  <a:srgbClr val="2C6E73"/>
                 </a:solidFill>
                 <a:latin typeface="Arial"/>
                 <a:ea typeface="Arial"/>
@@ -8480,9 +8484,9 @@
               </a:defRPr>
             </a:pPr>
             <a:r>
-              <a:rPr sz="1350" b="1">
-                <a:solidFill>
-                  <a:srgbClr val="FFFFFF"/>
+              <a:rPr sz="1125" b="1">
+                <a:solidFill>
+                  <a:srgbClr val="2C6E73"/>
                 </a:solidFill>
                 <a:latin typeface="Arial"/>
                 <a:ea typeface="Arial"/>
@@ -8498,19 +8502,19 @@
           <p:cNvPr id="16" name="">
             <a:extLst xmlns:a="http://schemas.openxmlformats.org/drawingml/2006/main">
               <a:ext uri="{FF2B5EF4-FFF2-40B4-BE49-F238E27FC236}">
-                <a16:creationId xmlns:a16="http://schemas.microsoft.com/office/drawing/2014/main" id="{C20F46BF-DCE4-475D-B0DD-00C28A1A2E65}"/>
-              </a:ext>
-            </a:extLst>
-          </p:cNvPr>
-          <p:cNvSpPr>
-            <a:spLocks xmlns:a="http://schemas.openxmlformats.org/drawingml/2006/main" noGrp="1"/>
-          </p:cNvSpPr>
-          <p:nvPr/>
-        </p:nvSpPr>
-        <p:spPr>
-          <a:xfrm xmlns:a="http://schemas.openxmlformats.org/drawingml/2006/main">
-            <a:off x="1714500" y="2924175"/>
-            <a:ext cx="9429750" cy="609600"/>
+                <a16:creationId xmlns:a16="http://schemas.microsoft.com/office/drawing/2014/main" id="{A1D3D134-CF14-4035-AA4D-C44479B681D8}"/>
+              </a:ext>
+            </a:extLst>
+          </p:cNvPr>
+          <p:cNvSpPr>
+            <a:spLocks xmlns:a="http://schemas.openxmlformats.org/drawingml/2006/main" noGrp="1"/>
+          </p:cNvSpPr>
+          <p:nvPr/>
+        </p:nvSpPr>
+        <p:spPr>
+          <a:xfrm xmlns:a="http://schemas.openxmlformats.org/drawingml/2006/main">
+            <a:off x="1714500" y="2990850"/>
+            <a:ext cx="9525000" cy="809625"/>
           </a:xfrm>
           <a:prstGeom xmlns:a="http://schemas.openxmlformats.org/drawingml/2006/main" prst="rect">
             <a:avLst/>
@@ -8527,7 +8531,7 @@
           <a:lstStyle xmlns:a="http://schemas.openxmlformats.org/drawingml/2006/main"/>
           <a:p xmlns:a="http://schemas.openxmlformats.org/drawingml/2006/main">
             <a:pPr algn="l">
-              <a:defRPr sz="1500" b="0">
+              <a:defRPr sz="1725" b="0">
                 <a:solidFill>
                   <a:srgbClr val="17253A"/>
                 </a:solidFill>
@@ -8537,7 +8541,7 @@
               </a:defRPr>
             </a:pPr>
             <a:r>
-              <a:rPr sz="1500" b="0">
+              <a:rPr sz="1725" b="0">
                 <a:solidFill>
                   <a:srgbClr val="17253A"/>
                 </a:solidFill>
@@ -8545,7 +8549,7 @@
                 <a:ea typeface="Arial"/>
                 <a:cs typeface="Arial"/>
               </a:rPr>
-              <a:t>Set up the method: Check the digit immediately to its right or locate the two boundaries.</a:t>
+              <a:t>203,118 → 200,000</a:t>
             </a:r>
           </a:p>
         </p:txBody>
@@ -8555,28 +8559,30 @@
           <p:cNvPr id="17" name="">
             <a:extLst xmlns:a="http://schemas.openxmlformats.org/drawingml/2006/main">
               <a:ext uri="{FF2B5EF4-FFF2-40B4-BE49-F238E27FC236}">
-                <a16:creationId xmlns:a16="http://schemas.microsoft.com/office/drawing/2014/main" id="{F963D0C3-BDDC-47A7-A3A9-0674778D5BB3}"/>
-              </a:ext>
-            </a:extLst>
-          </p:cNvPr>
-          <p:cNvSpPr>
-            <a:spLocks xmlns:a="http://schemas.openxmlformats.org/drawingml/2006/main" noGrp="1"/>
-          </p:cNvSpPr>
-          <p:nvPr/>
-        </p:nvSpPr>
-        <p:spPr>
-          <a:xfrm xmlns:a="http://schemas.openxmlformats.org/drawingml/2006/main">
-            <a:off x="1000125" y="3733800"/>
-            <a:ext cx="476250" cy="476250"/>
-          </a:xfrm>
-          <a:prstGeom xmlns:a="http://schemas.openxmlformats.org/drawingml/2006/main" prst="ellipse">
+                <a16:creationId xmlns:a16="http://schemas.microsoft.com/office/drawing/2014/main" id="{2A6E2A6F-E8BB-42FB-AF12-5EA651278256}"/>
+              </a:ext>
+            </a:extLst>
+          </p:cNvPr>
+          <p:cNvSpPr>
+            <a:spLocks xmlns:a="http://schemas.openxmlformats.org/drawingml/2006/main" noGrp="1"/>
+          </p:cNvSpPr>
+          <p:nvPr/>
+        </p:nvSpPr>
+        <p:spPr>
+          <a:xfrm xmlns:a="http://schemas.openxmlformats.org/drawingml/2006/main">
+            <a:off x="1714500" y="3819525"/>
+            <a:ext cx="9334500" cy="9525"/>
+          </a:xfrm>
+          <a:prstGeom xmlns:a="http://schemas.openxmlformats.org/drawingml/2006/main" prst="rect">
             <a:avLst/>
           </a:prstGeom>
           <a:solidFill xmlns:a="http://schemas.openxmlformats.org/drawingml/2006/main">
-            <a:srgbClr val="2C6E73"/>
+            <a:srgbClr val="D9E0E6"/>
           </a:solidFill>
           <a:ln xmlns:a="http://schemas.openxmlformats.org/drawingml/2006/main" w="0">
-            <a:noFill/>
+            <a:solidFill>
+              <a:srgbClr val="D9E0E6"/>
+            </a:solidFill>
           </a:ln>
         </p:spPr>
       </p:sp>
@@ -8585,19 +8591,19 @@
           <p:cNvPr id="18" name="">
             <a:extLst xmlns:a="http://schemas.openxmlformats.org/drawingml/2006/main">
               <a:ext uri="{FF2B5EF4-FFF2-40B4-BE49-F238E27FC236}">
-                <a16:creationId xmlns:a16="http://schemas.microsoft.com/office/drawing/2014/main" id="{6A68382B-C3B8-4AF0-8F72-909AAB447DD7}"/>
-              </a:ext>
-            </a:extLst>
-          </p:cNvPr>
-          <p:cNvSpPr>
-            <a:spLocks xmlns:a="http://schemas.openxmlformats.org/drawingml/2006/main" noGrp="1"/>
-          </p:cNvSpPr>
-          <p:nvPr/>
-        </p:nvSpPr>
-        <p:spPr>
-          <a:xfrm xmlns:a="http://schemas.openxmlformats.org/drawingml/2006/main">
-            <a:off x="1000125" y="3762375"/>
-            <a:ext cx="476250" cy="419100"/>
+                <a16:creationId xmlns:a16="http://schemas.microsoft.com/office/drawing/2014/main" id="{25C14E6B-9E13-49CE-86E8-E11D34327E1C}"/>
+              </a:ext>
+            </a:extLst>
+          </p:cNvPr>
+          <p:cNvSpPr>
+            <a:spLocks xmlns:a="http://schemas.openxmlformats.org/drawingml/2006/main" noGrp="1"/>
+          </p:cNvSpPr>
+          <p:nvPr/>
+        </p:nvSpPr>
+        <p:spPr>
+          <a:xfrm xmlns:a="http://schemas.openxmlformats.org/drawingml/2006/main">
+            <a:off x="1162050" y="3952875"/>
+            <a:ext cx="400050" cy="400050"/>
           </a:xfrm>
           <a:prstGeom xmlns:a="http://schemas.openxmlformats.org/drawingml/2006/main" prst="rect">
             <a:avLst/>
@@ -8614,9 +8620,9 @@
           <a:lstStyle xmlns:a="http://schemas.openxmlformats.org/drawingml/2006/main"/>
           <a:p xmlns:a="http://schemas.openxmlformats.org/drawingml/2006/main">
             <a:pPr algn="ctr">
-              <a:defRPr sz="1350" b="1">
-                <a:solidFill>
-                  <a:srgbClr val="FFFFFF"/>
+              <a:defRPr sz="1125" b="1">
+                <a:solidFill>
+                  <a:srgbClr val="2C6E73"/>
                 </a:solidFill>
                 <a:latin typeface="Arial"/>
                 <a:ea typeface="Arial"/>
@@ -8624,9 +8630,9 @@
               </a:defRPr>
             </a:pPr>
             <a:r>
-              <a:rPr sz="1350" b="1">
-                <a:solidFill>
-                  <a:srgbClr val="FFFFFF"/>
+              <a:rPr sz="1125" b="1">
+                <a:solidFill>
+                  <a:srgbClr val="2C6E73"/>
                 </a:solidFill>
                 <a:latin typeface="Arial"/>
                 <a:ea typeface="Arial"/>
@@ -8642,19 +8648,19 @@
           <p:cNvPr id="19" name="">
             <a:extLst xmlns:a="http://schemas.openxmlformats.org/drawingml/2006/main">
               <a:ext uri="{FF2B5EF4-FFF2-40B4-BE49-F238E27FC236}">
-                <a16:creationId xmlns:a16="http://schemas.microsoft.com/office/drawing/2014/main" id="{B694F994-28B8-4CA7-8626-FD6D35FB606B}"/>
-              </a:ext>
-            </a:extLst>
-          </p:cNvPr>
-          <p:cNvSpPr>
-            <a:spLocks xmlns:a="http://schemas.openxmlformats.org/drawingml/2006/main" noGrp="1"/>
-          </p:cNvSpPr>
-          <p:nvPr/>
-        </p:nvSpPr>
-        <p:spPr>
-          <a:xfrm xmlns:a="http://schemas.openxmlformats.org/drawingml/2006/main">
-            <a:off x="1714500" y="3667125"/>
-            <a:ext cx="9429750" cy="609600"/>
+                <a16:creationId xmlns:a16="http://schemas.microsoft.com/office/drawing/2014/main" id="{BF79F7EA-560D-4715-9830-4ECEEADC45C8}"/>
+              </a:ext>
+            </a:extLst>
+          </p:cNvPr>
+          <p:cNvSpPr>
+            <a:spLocks xmlns:a="http://schemas.openxmlformats.org/drawingml/2006/main" noGrp="1"/>
+          </p:cNvSpPr>
+          <p:nvPr/>
+        </p:nvSpPr>
+        <p:spPr>
+          <a:xfrm xmlns:a="http://schemas.openxmlformats.org/drawingml/2006/main">
+            <a:off x="1714500" y="3867150"/>
+            <a:ext cx="9525000" cy="809625"/>
           </a:xfrm>
           <a:prstGeom xmlns:a="http://schemas.openxmlformats.org/drawingml/2006/main" prst="rect">
             <a:avLst/>
@@ -8671,7 +8677,7 @@
           <a:lstStyle xmlns:a="http://schemas.openxmlformats.org/drawingml/2006/main"/>
           <a:p xmlns:a="http://schemas.openxmlformats.org/drawingml/2006/main">
             <a:pPr algn="l">
-              <a:defRPr sz="1500" b="0">
+              <a:defRPr sz="1725" b="0">
                 <a:solidFill>
                   <a:srgbClr val="17253A"/>
                 </a:solidFill>
@@ -8681,7 +8687,7 @@
               </a:defRPr>
             </a:pPr>
             <a:r>
-              <a:rPr sz="1500" b="0">
+              <a:rPr sz="1725" b="0">
                 <a:solidFill>
                   <a:srgbClr val="17253A"/>
                 </a:solidFill>
@@ -8689,7 +8695,7 @@
                 <a:ea typeface="Arial"/>
                 <a:cs typeface="Arial"/>
               </a:rPr>
-              <a:t>Complete the calculation: 400,000 + 200,000 = 600,000.</a:t>
+              <a:t>400,000 + 200,000</a:t>
             </a:r>
           </a:p>
         </p:txBody>
@@ -8699,28 +8705,30 @@
           <p:cNvPr id="20" name="">
             <a:extLst xmlns:a="http://schemas.openxmlformats.org/drawingml/2006/main">
               <a:ext uri="{FF2B5EF4-FFF2-40B4-BE49-F238E27FC236}">
-                <a16:creationId xmlns:a16="http://schemas.microsoft.com/office/drawing/2014/main" id="{E4E4F5A1-BE30-4736-89D0-A0680D02DA4E}"/>
-              </a:ext>
-            </a:extLst>
-          </p:cNvPr>
-          <p:cNvSpPr>
-            <a:spLocks xmlns:a="http://schemas.openxmlformats.org/drawingml/2006/main" noGrp="1"/>
-          </p:cNvSpPr>
-          <p:nvPr/>
-        </p:nvSpPr>
-        <p:spPr>
-          <a:xfrm xmlns:a="http://schemas.openxmlformats.org/drawingml/2006/main">
-            <a:off x="1000125" y="4476750"/>
-            <a:ext cx="476250" cy="476250"/>
-          </a:xfrm>
-          <a:prstGeom xmlns:a="http://schemas.openxmlformats.org/drawingml/2006/main" prst="ellipse">
+                <a16:creationId xmlns:a16="http://schemas.microsoft.com/office/drawing/2014/main" id="{83C40A39-DAAA-4109-927B-D7D2CD57D8F6}"/>
+              </a:ext>
+            </a:extLst>
+          </p:cNvPr>
+          <p:cNvSpPr>
+            <a:spLocks xmlns:a="http://schemas.openxmlformats.org/drawingml/2006/main" noGrp="1"/>
+          </p:cNvSpPr>
+          <p:nvPr/>
+        </p:nvSpPr>
+        <p:spPr>
+          <a:xfrm xmlns:a="http://schemas.openxmlformats.org/drawingml/2006/main">
+            <a:off x="1714500" y="4695825"/>
+            <a:ext cx="9334500" cy="9525"/>
+          </a:xfrm>
+          <a:prstGeom xmlns:a="http://schemas.openxmlformats.org/drawingml/2006/main" prst="rect">
             <a:avLst/>
           </a:prstGeom>
           <a:solidFill xmlns:a="http://schemas.openxmlformats.org/drawingml/2006/main">
-            <a:srgbClr val="2C6E73"/>
+            <a:srgbClr val="D9E0E6"/>
           </a:solidFill>
           <a:ln xmlns:a="http://schemas.openxmlformats.org/drawingml/2006/main" w="0">
-            <a:noFill/>
+            <a:solidFill>
+              <a:srgbClr val="D9E0E6"/>
+            </a:solidFill>
           </a:ln>
         </p:spPr>
       </p:sp>
@@ -8729,19 +8737,19 @@
           <p:cNvPr id="21" name="">
             <a:extLst xmlns:a="http://schemas.openxmlformats.org/drawingml/2006/main">
               <a:ext uri="{FF2B5EF4-FFF2-40B4-BE49-F238E27FC236}">
-                <a16:creationId xmlns:a16="http://schemas.microsoft.com/office/drawing/2014/main" id="{51BFF0B6-04C0-471F-AF50-78BD610ACCE4}"/>
-              </a:ext>
-            </a:extLst>
-          </p:cNvPr>
-          <p:cNvSpPr>
-            <a:spLocks xmlns:a="http://schemas.openxmlformats.org/drawingml/2006/main" noGrp="1"/>
-          </p:cNvSpPr>
-          <p:nvPr/>
-        </p:nvSpPr>
-        <p:spPr>
-          <a:xfrm xmlns:a="http://schemas.openxmlformats.org/drawingml/2006/main">
-            <a:off x="1000125" y="4505325"/>
-            <a:ext cx="476250" cy="419100"/>
+                <a16:creationId xmlns:a16="http://schemas.microsoft.com/office/drawing/2014/main" id="{E6685285-47DF-4F88-968D-26FA06B1C967}"/>
+              </a:ext>
+            </a:extLst>
+          </p:cNvPr>
+          <p:cNvSpPr>
+            <a:spLocks xmlns:a="http://schemas.openxmlformats.org/drawingml/2006/main" noGrp="1"/>
+          </p:cNvSpPr>
+          <p:nvPr/>
+        </p:nvSpPr>
+        <p:spPr>
+          <a:xfrm xmlns:a="http://schemas.openxmlformats.org/drawingml/2006/main">
+            <a:off x="1162050" y="4829175"/>
+            <a:ext cx="400050" cy="400050"/>
           </a:xfrm>
           <a:prstGeom xmlns:a="http://schemas.openxmlformats.org/drawingml/2006/main" prst="rect">
             <a:avLst/>
@@ -8758,9 +8766,9 @@
           <a:lstStyle xmlns:a="http://schemas.openxmlformats.org/drawingml/2006/main"/>
           <a:p xmlns:a="http://schemas.openxmlformats.org/drawingml/2006/main">
             <a:pPr algn="ctr">
-              <a:defRPr sz="1350" b="1">
-                <a:solidFill>
-                  <a:srgbClr val="FFFFFF"/>
+              <a:defRPr sz="1125" b="1">
+                <a:solidFill>
+                  <a:srgbClr val="2F785D"/>
                 </a:solidFill>
                 <a:latin typeface="Arial"/>
                 <a:ea typeface="Arial"/>
@@ -8768,9 +8776,9 @@
               </a:defRPr>
             </a:pPr>
             <a:r>
-              <a:rPr sz="1350" b="1">
-                <a:solidFill>
-                  <a:srgbClr val="FFFFFF"/>
+              <a:rPr sz="1125" b="1">
+                <a:solidFill>
+                  <a:srgbClr val="2F785D"/>
                 </a:solidFill>
                 <a:latin typeface="Arial"/>
                 <a:ea typeface="Arial"/>
@@ -8786,19 +8794,19 @@
           <p:cNvPr id="22" name="">
             <a:extLst xmlns:a="http://schemas.openxmlformats.org/drawingml/2006/main">
               <a:ext uri="{FF2B5EF4-FFF2-40B4-BE49-F238E27FC236}">
-                <a16:creationId xmlns:a16="http://schemas.microsoft.com/office/drawing/2014/main" id="{A7C36DC4-CD42-48C3-A111-751A5030D926}"/>
-              </a:ext>
-            </a:extLst>
-          </p:cNvPr>
-          <p:cNvSpPr>
-            <a:spLocks xmlns:a="http://schemas.openxmlformats.org/drawingml/2006/main" noGrp="1"/>
-          </p:cNvSpPr>
-          <p:nvPr/>
-        </p:nvSpPr>
-        <p:spPr>
-          <a:xfrm xmlns:a="http://schemas.openxmlformats.org/drawingml/2006/main">
-            <a:off x="1714500" y="4410075"/>
-            <a:ext cx="9429750" cy="609600"/>
+                <a16:creationId xmlns:a16="http://schemas.microsoft.com/office/drawing/2014/main" id="{DBD1C599-5CAA-446D-8FFF-5C45487E6162}"/>
+              </a:ext>
+            </a:extLst>
+          </p:cNvPr>
+          <p:cNvSpPr>
+            <a:spLocks xmlns:a="http://schemas.openxmlformats.org/drawingml/2006/main" noGrp="1"/>
+          </p:cNvSpPr>
+          <p:nvPr/>
+        </p:nvSpPr>
+        <p:spPr>
+          <a:xfrm xmlns:a="http://schemas.openxmlformats.org/drawingml/2006/main">
+            <a:off x="1714500" y="4743450"/>
+            <a:ext cx="9525000" cy="809625"/>
           </a:xfrm>
           <a:prstGeom xmlns:a="http://schemas.openxmlformats.org/drawingml/2006/main" prst="rect">
             <a:avLst/>
@@ -8815,7 +8823,7 @@
           <a:lstStyle xmlns:a="http://schemas.openxmlformats.org/drawingml/2006/main"/>
           <a:p xmlns:a="http://schemas.openxmlformats.org/drawingml/2006/main">
             <a:pPr algn="l">
-              <a:defRPr sz="1500" b="1">
+              <a:defRPr sz="1725" b="1">
                 <a:solidFill>
                   <a:srgbClr val="2F785D"/>
                 </a:solidFill>
@@ -8825,7 +8833,7 @@
               </a:defRPr>
             </a:pPr>
             <a:r>
-              <a:rPr sz="1500" b="1">
+              <a:rPr sz="1725" b="1">
                 <a:solidFill>
                   <a:srgbClr val="2F785D"/>
                 </a:solidFill>
@@ -8833,7 +8841,7 @@
                 <a:ea typeface="Arial"/>
                 <a:cs typeface="Arial"/>
               </a:rPr>
-              <a:t>Check the result: Round to the nearer multiple and replace following digits with zeros.</a:t>
+              <a:t>Estimated total = 600,000</a:t>
             </a:r>
           </a:p>
         </p:txBody>
@@ -8841,7 +8849,7 @@
     </p:spTree>
     <p:extLst>
       <p:ext uri="{BB962C8B-B14F-4D97-AF65-F5344CB8AC3E}">
-        <p14:creationId xmlns:p14="http://schemas.microsoft.com/office/powerpoint/2010/main" val="1860564671"/>
+        <p14:creationId xmlns:p14="http://schemas.microsoft.com/office/powerpoint/2010/main" val="1107971221"/>
       </p:ext>
     </p:extLst>
   </p:cSld>
@@ -9134,7 +9142,7 @@
           <p:cNvPr id="15" name="">
             <a:extLst xmlns:a="http://schemas.openxmlformats.org/drawingml/2006/main">
               <a:ext uri="{FF2B5EF4-FFF2-40B4-BE49-F238E27FC236}">
-                <a16:creationId xmlns:a16="http://schemas.microsoft.com/office/drawing/2014/main" id="{0D6E238A-D03B-4BA1-8C57-E9BD46448C0B}"/>
+                <a16:creationId xmlns:a16="http://schemas.microsoft.com/office/drawing/2014/main" id="{67D33A61-FE21-4198-9827-D0F273527851}"/>
               </a:ext>
             </a:extLst>
           </p:cNvPr>
@@ -9166,7 +9174,7 @@
           <p:cNvPr id="2" name="">
             <a:extLst xmlns:a="http://schemas.openxmlformats.org/drawingml/2006/main">
               <a:ext uri="{FF2B5EF4-FFF2-40B4-BE49-F238E27FC236}">
-                <a16:creationId xmlns:a16="http://schemas.microsoft.com/office/drawing/2014/main" id="{C5F83539-8857-4B96-B0C3-B5793B771C12}"/>
+                <a16:creationId xmlns:a16="http://schemas.microsoft.com/office/drawing/2014/main" id="{75AAA55B-4FF9-40A5-A581-256F1336C813}"/>
               </a:ext>
             </a:extLst>
           </p:cNvPr>
@@ -9223,7 +9231,7 @@
           <p:cNvPr id="3" name="">
             <a:extLst xmlns:a="http://schemas.openxmlformats.org/drawingml/2006/main">
               <a:ext uri="{FF2B5EF4-FFF2-40B4-BE49-F238E27FC236}">
-                <a16:creationId xmlns:a16="http://schemas.microsoft.com/office/drawing/2014/main" id="{853E420D-54A8-476E-A6A8-B387D5AA201D}"/>
+                <a16:creationId xmlns:a16="http://schemas.microsoft.com/office/drawing/2014/main" id="{6B11E139-C1BA-4905-949E-11296C66F8F4}"/>
               </a:ext>
             </a:extLst>
           </p:cNvPr>
@@ -9255,7 +9263,7 @@
           <p:cNvPr id="4" name="">
             <a:extLst xmlns:a="http://schemas.openxmlformats.org/drawingml/2006/main">
               <a:ext uri="{FF2B5EF4-FFF2-40B4-BE49-F238E27FC236}">
-                <a16:creationId xmlns:a16="http://schemas.microsoft.com/office/drawing/2014/main" id="{36A088DD-0CC6-4F69-B5E7-911A286171D8}"/>
+                <a16:creationId xmlns:a16="http://schemas.microsoft.com/office/drawing/2014/main" id="{BD907704-25A6-4B06-A793-29FE99C315B1}"/>
               </a:ext>
             </a:extLst>
           </p:cNvPr>
@@ -9312,7 +9320,7 @@
           <p:cNvPr id="5" name="">
             <a:extLst xmlns:a="http://schemas.openxmlformats.org/drawingml/2006/main">
               <a:ext uri="{FF2B5EF4-FFF2-40B4-BE49-F238E27FC236}">
-                <a16:creationId xmlns:a16="http://schemas.microsoft.com/office/drawing/2014/main" id="{12458672-9FE2-49DA-B63E-8F6D7386BA14}"/>
+                <a16:creationId xmlns:a16="http://schemas.microsoft.com/office/drawing/2014/main" id="{541CE126-BA35-43E5-AA36-147A7DF5DC09}"/>
               </a:ext>
             </a:extLst>
           </p:cNvPr>
@@ -9369,7 +9377,7 @@
           <p:cNvPr id="6" name="">
             <a:extLst xmlns:a="http://schemas.openxmlformats.org/drawingml/2006/main">
               <a:ext uri="{FF2B5EF4-FFF2-40B4-BE49-F238E27FC236}">
-                <a16:creationId xmlns:a16="http://schemas.microsoft.com/office/drawing/2014/main" id="{06BDB101-F291-4D82-A2E5-71182BC20AC1}"/>
+                <a16:creationId xmlns:a16="http://schemas.microsoft.com/office/drawing/2014/main" id="{5BD5C73B-9091-4A86-84FE-63CBA80CC299}"/>
               </a:ext>
             </a:extLst>
           </p:cNvPr>
@@ -9426,7 +9434,7 @@
           <p:cNvPr id="7" name="">
             <a:extLst xmlns:a="http://schemas.openxmlformats.org/drawingml/2006/main">
               <a:ext uri="{FF2B5EF4-FFF2-40B4-BE49-F238E27FC236}">
-                <a16:creationId xmlns:a16="http://schemas.microsoft.com/office/drawing/2014/main" id="{1F33724B-8BAE-45FD-B6A4-35F9F54C2857}"/>
+                <a16:creationId xmlns:a16="http://schemas.microsoft.com/office/drawing/2014/main" id="{79F28B95-E689-427E-8234-A22E9F104F9E}"/>
               </a:ext>
             </a:extLst>
           </p:cNvPr>
@@ -9458,7 +9466,7 @@
           <p:cNvPr id="8" name="">
             <a:extLst xmlns:a="http://schemas.openxmlformats.org/drawingml/2006/main">
               <a:ext uri="{FF2B5EF4-FFF2-40B4-BE49-F238E27FC236}">
-                <a16:creationId xmlns:a16="http://schemas.microsoft.com/office/drawing/2014/main" id="{657D1516-132C-453C-AED9-F2353148409B}"/>
+                <a16:creationId xmlns:a16="http://schemas.microsoft.com/office/drawing/2014/main" id="{73188144-9C0B-4900-B054-16D1DB47B6F9}"/>
               </a:ext>
             </a:extLst>
           </p:cNvPr>
@@ -9515,7 +9523,7 @@
           <p:cNvPr id="9" name="">
             <a:extLst xmlns:a="http://schemas.openxmlformats.org/drawingml/2006/main">
               <a:ext uri="{FF2B5EF4-FFF2-40B4-BE49-F238E27FC236}">
-                <a16:creationId xmlns:a16="http://schemas.microsoft.com/office/drawing/2014/main" id="{B3861C50-5423-4FA2-BB3F-611CEE17734F}"/>
+                <a16:creationId xmlns:a16="http://schemas.microsoft.com/office/drawing/2014/main" id="{971305D9-9ACB-4933-8F47-3A20A37A2F68}"/>
               </a:ext>
             </a:extLst>
           </p:cNvPr>
@@ -9572,7 +9580,7 @@
           <p:cNvPr id="10" name="">
             <a:extLst xmlns:a="http://schemas.openxmlformats.org/drawingml/2006/main">
               <a:ext uri="{FF2B5EF4-FFF2-40B4-BE49-F238E27FC236}">
-                <a16:creationId xmlns:a16="http://schemas.microsoft.com/office/drawing/2014/main" id="{B32952ED-0F8D-4E74-ADCD-3BC874919AA6}"/>
+                <a16:creationId xmlns:a16="http://schemas.microsoft.com/office/drawing/2014/main" id="{01680CE6-6C25-4164-B4B4-FD1F40C4E6A0}"/>
               </a:ext>
             </a:extLst>
           </p:cNvPr>
@@ -9629,7 +9637,7 @@
           <p:cNvPr id="11" name="">
             <a:extLst xmlns:a="http://schemas.openxmlformats.org/drawingml/2006/main">
               <a:ext uri="{FF2B5EF4-FFF2-40B4-BE49-F238E27FC236}">
-                <a16:creationId xmlns:a16="http://schemas.microsoft.com/office/drawing/2014/main" id="{8A3573E0-7136-4A09-8598-04C3A2FA5D4D}"/>
+                <a16:creationId xmlns:a16="http://schemas.microsoft.com/office/drawing/2014/main" id="{878DA1D9-47CA-4C00-9655-6ED82A025705}"/>
               </a:ext>
             </a:extLst>
           </p:cNvPr>
@@ -9686,7 +9694,7 @@
           <p:cNvPr id="12" name="">
             <a:extLst xmlns:a="http://schemas.openxmlformats.org/drawingml/2006/main">
               <a:ext uri="{FF2B5EF4-FFF2-40B4-BE49-F238E27FC236}">
-                <a16:creationId xmlns:a16="http://schemas.microsoft.com/office/drawing/2014/main" id="{791119C3-21D9-4141-B5DB-0D92FF76EE20}"/>
+                <a16:creationId xmlns:a16="http://schemas.microsoft.com/office/drawing/2014/main" id="{EA79EF21-E9B8-4038-BDB5-866580BC374F}"/>
               </a:ext>
             </a:extLst>
           </p:cNvPr>
@@ -9718,7 +9726,7 @@
           <p:cNvPr id="13" name="">
             <a:extLst xmlns:a="http://schemas.openxmlformats.org/drawingml/2006/main">
               <a:ext uri="{FF2B5EF4-FFF2-40B4-BE49-F238E27FC236}">
-                <a16:creationId xmlns:a16="http://schemas.microsoft.com/office/drawing/2014/main" id="{367F5992-AFC1-4D7E-A269-D7C5D5D57471}"/>
+                <a16:creationId xmlns:a16="http://schemas.microsoft.com/office/drawing/2014/main" id="{8CD4BB8B-264A-43A9-B78A-8F021A7688C8}"/>
               </a:ext>
             </a:extLst>
           </p:cNvPr>
@@ -9775,7 +9783,7 @@
           <p:cNvPr id="14" name="">
             <a:extLst xmlns:a="http://schemas.openxmlformats.org/drawingml/2006/main">
               <a:ext uri="{FF2B5EF4-FFF2-40B4-BE49-F238E27FC236}">
-                <a16:creationId xmlns:a16="http://schemas.microsoft.com/office/drawing/2014/main" id="{49407E9A-4FD6-48C6-89C6-092036AA2024}"/>
+                <a16:creationId xmlns:a16="http://schemas.microsoft.com/office/drawing/2014/main" id="{C175EA7E-B19A-4603-9853-CA459A0AF379}"/>
               </a:ext>
             </a:extLst>
           </p:cNvPr>
@@ -9830,7 +9838,7 @@
     </p:spTree>
     <p:extLst>
       <p:ext uri="{BB962C8B-B14F-4D97-AF65-F5344CB8AC3E}">
-        <p14:creationId xmlns:p14="http://schemas.microsoft.com/office/powerpoint/2010/main" val="278601428"/>
+        <p14:creationId xmlns:p14="http://schemas.microsoft.com/office/powerpoint/2010/main" val="1742153598"/>
       </p:ext>
     </p:extLst>
   </p:cSld>
@@ -10031,7 +10039,7 @@
           <p:cNvPr id="16" name="">
             <a:extLst xmlns:a="http://schemas.openxmlformats.org/drawingml/2006/main">
               <a:ext uri="{FF2B5EF4-FFF2-40B4-BE49-F238E27FC236}">
-                <a16:creationId xmlns:a16="http://schemas.microsoft.com/office/drawing/2014/main" id="{03680C74-BF24-44DD-9380-10B9CC10CA58}"/>
+                <a16:creationId xmlns:a16="http://schemas.microsoft.com/office/drawing/2014/main" id="{4BC239B4-1B5E-44DA-BA46-D91F1FC6BE05}"/>
               </a:ext>
             </a:extLst>
           </p:cNvPr>
@@ -10063,7 +10071,7 @@
           <p:cNvPr id="2" name="">
             <a:extLst xmlns:a="http://schemas.openxmlformats.org/drawingml/2006/main">
               <a:ext uri="{FF2B5EF4-FFF2-40B4-BE49-F238E27FC236}">
-                <a16:creationId xmlns:a16="http://schemas.microsoft.com/office/drawing/2014/main" id="{33D31B61-D360-43DC-AA4B-2986779938D2}"/>
+                <a16:creationId xmlns:a16="http://schemas.microsoft.com/office/drawing/2014/main" id="{FDBD5331-F69C-4183-8458-2C7D0D3F0218}"/>
               </a:ext>
             </a:extLst>
           </p:cNvPr>
@@ -10120,7 +10128,7 @@
           <p:cNvPr id="3" name="">
             <a:extLst xmlns:a="http://schemas.openxmlformats.org/drawingml/2006/main">
               <a:ext uri="{FF2B5EF4-FFF2-40B4-BE49-F238E27FC236}">
-                <a16:creationId xmlns:a16="http://schemas.microsoft.com/office/drawing/2014/main" id="{142B9600-350F-4D86-B1CB-2282E0FA08AC}"/>
+                <a16:creationId xmlns:a16="http://schemas.microsoft.com/office/drawing/2014/main" id="{E8A8995C-3C63-402A-8B6A-65CFB5C0B53A}"/>
               </a:ext>
             </a:extLst>
           </p:cNvPr>
@@ -10152,7 +10160,7 @@
           <p:cNvPr id="4" name="">
             <a:extLst xmlns:a="http://schemas.openxmlformats.org/drawingml/2006/main">
               <a:ext uri="{FF2B5EF4-FFF2-40B4-BE49-F238E27FC236}">
-                <a16:creationId xmlns:a16="http://schemas.microsoft.com/office/drawing/2014/main" id="{B2289487-BD18-4F2F-B2C4-19250E4F54CC}"/>
+                <a16:creationId xmlns:a16="http://schemas.microsoft.com/office/drawing/2014/main" id="{526C5DD5-D52D-4C94-81A8-6FFC20E46681}"/>
               </a:ext>
             </a:extLst>
           </p:cNvPr>
@@ -10209,7 +10217,7 @@
           <p:cNvPr id="5" name="">
             <a:extLst xmlns:a="http://schemas.openxmlformats.org/drawingml/2006/main">
               <a:ext uri="{FF2B5EF4-FFF2-40B4-BE49-F238E27FC236}">
-                <a16:creationId xmlns:a16="http://schemas.microsoft.com/office/drawing/2014/main" id="{010591BD-F52D-49BD-B321-BF36F90908B4}"/>
+                <a16:creationId xmlns:a16="http://schemas.microsoft.com/office/drawing/2014/main" id="{5B02478B-415E-4F94-837A-63643E2BDDA3}"/>
               </a:ext>
             </a:extLst>
           </p:cNvPr>
@@ -10266,7 +10274,7 @@
           <p:cNvPr id="6" name="">
             <a:extLst xmlns:a="http://schemas.openxmlformats.org/drawingml/2006/main">
               <a:ext uri="{FF2B5EF4-FFF2-40B4-BE49-F238E27FC236}">
-                <a16:creationId xmlns:a16="http://schemas.microsoft.com/office/drawing/2014/main" id="{A965C358-0C0B-4FAA-B96F-D21AB91FF667}"/>
+                <a16:creationId xmlns:a16="http://schemas.microsoft.com/office/drawing/2014/main" id="{3EDF38C5-D894-442F-B8E7-43A941CBBB8B}"/>
               </a:ext>
             </a:extLst>
           </p:cNvPr>
@@ -10323,7 +10331,7 @@
           <p:cNvPr id="7" name="">
             <a:extLst xmlns:a="http://schemas.openxmlformats.org/drawingml/2006/main">
               <a:ext uri="{FF2B5EF4-FFF2-40B4-BE49-F238E27FC236}">
-                <a16:creationId xmlns:a16="http://schemas.microsoft.com/office/drawing/2014/main" id="{EA52FA6D-4C90-4890-B291-8F29301B93C6}"/>
+                <a16:creationId xmlns:a16="http://schemas.microsoft.com/office/drawing/2014/main" id="{75E6384E-1D8A-4B31-8A48-BA913AA37748}"/>
               </a:ext>
             </a:extLst>
           </p:cNvPr>
@@ -10355,7 +10363,7 @@
           <p:cNvPr id="8" name="">
             <a:extLst xmlns:a="http://schemas.openxmlformats.org/drawingml/2006/main">
               <a:ext uri="{FF2B5EF4-FFF2-40B4-BE49-F238E27FC236}">
-                <a16:creationId xmlns:a16="http://schemas.microsoft.com/office/drawing/2014/main" id="{C152ED8B-7917-4214-ABC3-7E2A9E3AB68C}"/>
+                <a16:creationId xmlns:a16="http://schemas.microsoft.com/office/drawing/2014/main" id="{833587FA-FB74-47C5-A515-AA8A18136753}"/>
               </a:ext>
             </a:extLst>
           </p:cNvPr>
@@ -10412,7 +10420,7 @@
           <p:cNvPr id="9" name="">
             <a:extLst xmlns:a="http://schemas.openxmlformats.org/drawingml/2006/main">
               <a:ext uri="{FF2B5EF4-FFF2-40B4-BE49-F238E27FC236}">
-                <a16:creationId xmlns:a16="http://schemas.microsoft.com/office/drawing/2014/main" id="{87C6FC42-17BE-419D-8D09-30425ADB642E}"/>
+                <a16:creationId xmlns:a16="http://schemas.microsoft.com/office/drawing/2014/main" id="{05216261-D773-4733-BB19-556E39BADF90}"/>
               </a:ext>
             </a:extLst>
           </p:cNvPr>
@@ -10469,7 +10477,7 @@
           <p:cNvPr id="10" name="">
             <a:extLst xmlns:a="http://schemas.openxmlformats.org/drawingml/2006/main">
               <a:ext uri="{FF2B5EF4-FFF2-40B4-BE49-F238E27FC236}">
-                <a16:creationId xmlns:a16="http://schemas.microsoft.com/office/drawing/2014/main" id="{75F44741-8DA6-4F88-8343-1EAEF71B6B4D}"/>
+                <a16:creationId xmlns:a16="http://schemas.microsoft.com/office/drawing/2014/main" id="{946FF79F-15AF-4D0C-B970-C312C434C72B}"/>
               </a:ext>
             </a:extLst>
           </p:cNvPr>
@@ -10526,7 +10534,7 @@
           <p:cNvPr id="11" name="">
             <a:extLst xmlns:a="http://schemas.openxmlformats.org/drawingml/2006/main">
               <a:ext uri="{FF2B5EF4-FFF2-40B4-BE49-F238E27FC236}">
-                <a16:creationId xmlns:a16="http://schemas.microsoft.com/office/drawing/2014/main" id="{F314A8E7-DF0C-4618-975E-727256B8911B}"/>
+                <a16:creationId xmlns:a16="http://schemas.microsoft.com/office/drawing/2014/main" id="{AF1D94DA-2350-4EF3-BBFB-FDF21D1EE69A}"/>
               </a:ext>
             </a:extLst>
           </p:cNvPr>
@@ -10583,7 +10591,7 @@
           <p:cNvPr id="12" name="">
             <a:extLst xmlns:a="http://schemas.openxmlformats.org/drawingml/2006/main">
               <a:ext uri="{FF2B5EF4-FFF2-40B4-BE49-F238E27FC236}">
-                <a16:creationId xmlns:a16="http://schemas.microsoft.com/office/drawing/2014/main" id="{49138754-2BC8-4B55-8172-798847A2FD13}"/>
+                <a16:creationId xmlns:a16="http://schemas.microsoft.com/office/drawing/2014/main" id="{8A18DCD7-5A48-4BCD-9F48-A1D913A22B40}"/>
               </a:ext>
             </a:extLst>
           </p:cNvPr>
@@ -10640,7 +10648,7 @@
           <p:cNvPr id="13" name="">
             <a:extLst xmlns:a="http://schemas.openxmlformats.org/drawingml/2006/main">
               <a:ext uri="{FF2B5EF4-FFF2-40B4-BE49-F238E27FC236}">
-                <a16:creationId xmlns:a16="http://schemas.microsoft.com/office/drawing/2014/main" id="{86548714-A465-4699-81E3-E0B72402A024}"/>
+                <a16:creationId xmlns:a16="http://schemas.microsoft.com/office/drawing/2014/main" id="{B678145A-435E-4C3E-AC1B-6F490DD32A5A}"/>
               </a:ext>
             </a:extLst>
           </p:cNvPr>
@@ -10697,7 +10705,7 @@
           <p:cNvPr id="14" name="">
             <a:extLst xmlns:a="http://schemas.openxmlformats.org/drawingml/2006/main">
               <a:ext uri="{FF2B5EF4-FFF2-40B4-BE49-F238E27FC236}">
-                <a16:creationId xmlns:a16="http://schemas.microsoft.com/office/drawing/2014/main" id="{E75DF1D4-2B61-44B0-BF24-A83E7FB78048}"/>
+                <a16:creationId xmlns:a16="http://schemas.microsoft.com/office/drawing/2014/main" id="{C3B5FF90-4353-4C07-B779-69F9DA305725}"/>
               </a:ext>
             </a:extLst>
           </p:cNvPr>
@@ -10754,7 +10762,7 @@
           <p:cNvPr id="15" name="">
             <a:extLst xmlns:a="http://schemas.openxmlformats.org/drawingml/2006/main">
               <a:ext uri="{FF2B5EF4-FFF2-40B4-BE49-F238E27FC236}">
-                <a16:creationId xmlns:a16="http://schemas.microsoft.com/office/drawing/2014/main" id="{98DD09C3-6083-4F15-ABA1-898D28CB9504}"/>
+                <a16:creationId xmlns:a16="http://schemas.microsoft.com/office/drawing/2014/main" id="{E22C06D0-62CD-4FF1-B3F9-5B29ACF272F2}"/>
               </a:ext>
             </a:extLst>
           </p:cNvPr>
@@ -10809,7 +10817,7 @@
     </p:spTree>
     <p:extLst>
       <p:ext uri="{BB962C8B-B14F-4D97-AF65-F5344CB8AC3E}">
-        <p14:creationId xmlns:p14="http://schemas.microsoft.com/office/powerpoint/2010/main" val="1245214823"/>
+        <p14:creationId xmlns:p14="http://schemas.microsoft.com/office/powerpoint/2010/main" val="1952982690"/>
       </p:ext>
     </p:extLst>
   </p:cSld>
@@ -10964,7 +10972,7 @@
           <p:cNvPr id="16" name="">
             <a:extLst xmlns:a="http://schemas.openxmlformats.org/drawingml/2006/main">
               <a:ext uri="{FF2B5EF4-FFF2-40B4-BE49-F238E27FC236}">
-                <a16:creationId xmlns:a16="http://schemas.microsoft.com/office/drawing/2014/main" id="{11B4EB00-F9AB-4661-8789-7525E9B22010}"/>
+                <a16:creationId xmlns:a16="http://schemas.microsoft.com/office/drawing/2014/main" id="{C7EA3909-06A8-415D-8F39-1356453AC80C}"/>
               </a:ext>
             </a:extLst>
           </p:cNvPr>
@@ -10996,7 +11004,7 @@
           <p:cNvPr id="2" name="">
             <a:extLst xmlns:a="http://schemas.openxmlformats.org/drawingml/2006/main">
               <a:ext uri="{FF2B5EF4-FFF2-40B4-BE49-F238E27FC236}">
-                <a16:creationId xmlns:a16="http://schemas.microsoft.com/office/drawing/2014/main" id="{7A218368-3279-4514-9A5C-B5C0E03A7DC1}"/>
+                <a16:creationId xmlns:a16="http://schemas.microsoft.com/office/drawing/2014/main" id="{9CD325A2-5DAB-42FB-B4B3-6B774CF77194}"/>
               </a:ext>
             </a:extLst>
           </p:cNvPr>
@@ -11053,7 +11061,7 @@
           <p:cNvPr id="3" name="">
             <a:extLst xmlns:a="http://schemas.openxmlformats.org/drawingml/2006/main">
               <a:ext uri="{FF2B5EF4-FFF2-40B4-BE49-F238E27FC236}">
-                <a16:creationId xmlns:a16="http://schemas.microsoft.com/office/drawing/2014/main" id="{0AF3061D-DD45-4FDC-96F9-06CBF43FE5E5}"/>
+                <a16:creationId xmlns:a16="http://schemas.microsoft.com/office/drawing/2014/main" id="{196AE27B-D52E-4E52-B31C-FF1C138FABB1}"/>
               </a:ext>
             </a:extLst>
           </p:cNvPr>
@@ -11085,7 +11093,7 @@
           <p:cNvPr id="4" name="">
             <a:extLst xmlns:a="http://schemas.openxmlformats.org/drawingml/2006/main">
               <a:ext uri="{FF2B5EF4-FFF2-40B4-BE49-F238E27FC236}">
-                <a16:creationId xmlns:a16="http://schemas.microsoft.com/office/drawing/2014/main" id="{097B0C00-F049-4B2C-9C4F-F446967157C7}"/>
+                <a16:creationId xmlns:a16="http://schemas.microsoft.com/office/drawing/2014/main" id="{C177FBD4-23BD-49B5-8CB0-C0AF96542683}"/>
               </a:ext>
             </a:extLst>
           </p:cNvPr>
@@ -11142,7 +11150,7 @@
           <p:cNvPr id="5" name="">
             <a:extLst xmlns:a="http://schemas.openxmlformats.org/drawingml/2006/main">
               <a:ext uri="{FF2B5EF4-FFF2-40B4-BE49-F238E27FC236}">
-                <a16:creationId xmlns:a16="http://schemas.microsoft.com/office/drawing/2014/main" id="{F0BF45AA-BC43-4199-97D0-19CEC5BC70C4}"/>
+                <a16:creationId xmlns:a16="http://schemas.microsoft.com/office/drawing/2014/main" id="{D342ED04-D1B3-4E23-B28A-021D13218FE8}"/>
               </a:ext>
             </a:extLst>
           </p:cNvPr>
@@ -11199,7 +11207,7 @@
           <p:cNvPr id="6" name="">
             <a:extLst xmlns:a="http://schemas.openxmlformats.org/drawingml/2006/main">
               <a:ext uri="{FF2B5EF4-FFF2-40B4-BE49-F238E27FC236}">
-                <a16:creationId xmlns:a16="http://schemas.microsoft.com/office/drawing/2014/main" id="{4EA686BC-5B0A-4A09-901C-7DCA86B922B3}"/>
+                <a16:creationId xmlns:a16="http://schemas.microsoft.com/office/drawing/2014/main" id="{0D975B9C-FC11-45E9-A391-AFBB51F8AEA2}"/>
               </a:ext>
             </a:extLst>
           </p:cNvPr>
@@ -11256,7 +11264,7 @@
           <p:cNvPr id="7" name="">
             <a:extLst xmlns:a="http://schemas.openxmlformats.org/drawingml/2006/main">
               <a:ext uri="{FF2B5EF4-FFF2-40B4-BE49-F238E27FC236}">
-                <a16:creationId xmlns:a16="http://schemas.microsoft.com/office/drawing/2014/main" id="{1C3B6A62-65B7-4080-AC12-65A10590EFF9}"/>
+                <a16:creationId xmlns:a16="http://schemas.microsoft.com/office/drawing/2014/main" id="{70B10258-4880-44D9-89DC-8FB9DFA4E4F0}"/>
               </a:ext>
             </a:extLst>
           </p:cNvPr>
@@ -11288,7 +11296,7 @@
           <p:cNvPr id="8" name="">
             <a:extLst xmlns:a="http://schemas.openxmlformats.org/drawingml/2006/main">
               <a:ext uri="{FF2B5EF4-FFF2-40B4-BE49-F238E27FC236}">
-                <a16:creationId xmlns:a16="http://schemas.microsoft.com/office/drawing/2014/main" id="{F5DABAE9-3E9B-4753-AD77-D059B869521B}"/>
+                <a16:creationId xmlns:a16="http://schemas.microsoft.com/office/drawing/2014/main" id="{0357D92B-E648-4778-AA66-5A5882F32F2F}"/>
               </a:ext>
             </a:extLst>
           </p:cNvPr>
@@ -11345,7 +11353,7 @@
           <p:cNvPr id="9" name="">
             <a:extLst xmlns:a="http://schemas.openxmlformats.org/drawingml/2006/main">
               <a:ext uri="{FF2B5EF4-FFF2-40B4-BE49-F238E27FC236}">
-                <a16:creationId xmlns:a16="http://schemas.microsoft.com/office/drawing/2014/main" id="{AD1FFC5E-CF7F-4EB5-9727-3EC784FEFBFD}"/>
+                <a16:creationId xmlns:a16="http://schemas.microsoft.com/office/drawing/2014/main" id="{45A84AA5-8DCB-4A16-AF51-FE59548E32B2}"/>
               </a:ext>
             </a:extLst>
           </p:cNvPr>
@@ -11406,7 +11414,7 @@
           <p:nvPr/>
         </p:nvPicPr>
         <p:blipFill>
-          <a:blip xmlns:r="http://schemas.openxmlformats.org/officeDocument/2006/relationships" xmlns:a="http://schemas.openxmlformats.org/drawingml/2006/main" r:embed="Rfe702ea11b7542e8"/>
+          <a:blip xmlns:r="http://schemas.openxmlformats.org/officeDocument/2006/relationships" xmlns:a="http://schemas.openxmlformats.org/drawingml/2006/main" r:embed="R48b116a5f0ec4a92"/>
           <a:stretch xmlns:a="http://schemas.openxmlformats.org/drawingml/2006/main"/>
         </p:blipFill>
         <p:spPr>
@@ -11424,7 +11432,7 @@
           <p:cNvPr id="11" name="">
             <a:extLst xmlns:a="http://schemas.openxmlformats.org/drawingml/2006/main">
               <a:ext uri="{FF2B5EF4-FFF2-40B4-BE49-F238E27FC236}">
-                <a16:creationId xmlns:a16="http://schemas.microsoft.com/office/drawing/2014/main" id="{72A127CD-31FD-4A2B-BDC0-F296361684BF}"/>
+                <a16:creationId xmlns:a16="http://schemas.microsoft.com/office/drawing/2014/main" id="{FDBA80B4-80E2-41B0-A90A-88DBDE246DA2}"/>
               </a:ext>
             </a:extLst>
           </p:cNvPr>
@@ -11481,7 +11489,7 @@
           <p:cNvPr id="12" name="">
             <a:extLst xmlns:a="http://schemas.openxmlformats.org/drawingml/2006/main">
               <a:ext uri="{FF2B5EF4-FFF2-40B4-BE49-F238E27FC236}">
-                <a16:creationId xmlns:a16="http://schemas.microsoft.com/office/drawing/2014/main" id="{CD387D67-5694-4C31-BCA0-76797BE8625E}"/>
+                <a16:creationId xmlns:a16="http://schemas.microsoft.com/office/drawing/2014/main" id="{16B32052-E5C8-42CF-99DE-B5A5136BB98F}"/>
               </a:ext>
             </a:extLst>
           </p:cNvPr>
@@ -11538,7 +11546,7 @@
           <p:cNvPr id="13" name="">
             <a:extLst xmlns:a="http://schemas.openxmlformats.org/drawingml/2006/main">
               <a:ext uri="{FF2B5EF4-FFF2-40B4-BE49-F238E27FC236}">
-                <a16:creationId xmlns:a16="http://schemas.microsoft.com/office/drawing/2014/main" id="{9B779545-457C-4ABD-88FE-683AADFD3666}"/>
+                <a16:creationId xmlns:a16="http://schemas.microsoft.com/office/drawing/2014/main" id="{909F1C8B-8105-4282-B1C8-66E6C3BB726B}"/>
               </a:ext>
             </a:extLst>
           </p:cNvPr>
@@ -11570,7 +11578,7 @@
           <p:cNvPr id="14" name="">
             <a:extLst xmlns:a="http://schemas.openxmlformats.org/drawingml/2006/main">
               <a:ext uri="{FF2B5EF4-FFF2-40B4-BE49-F238E27FC236}">
-                <a16:creationId xmlns:a16="http://schemas.microsoft.com/office/drawing/2014/main" id="{A01ADA3E-2EE2-4F32-8DAA-6475DDCEBDBA}"/>
+                <a16:creationId xmlns:a16="http://schemas.microsoft.com/office/drawing/2014/main" id="{05515136-3B8A-4C58-A1BD-0A19DDCEE0C2}"/>
               </a:ext>
             </a:extLst>
           </p:cNvPr>
@@ -11627,7 +11635,7 @@
           <p:cNvPr id="15" name="">
             <a:extLst xmlns:a="http://schemas.openxmlformats.org/drawingml/2006/main">
               <a:ext uri="{FF2B5EF4-FFF2-40B4-BE49-F238E27FC236}">
-                <a16:creationId xmlns:a16="http://schemas.microsoft.com/office/drawing/2014/main" id="{6CC6A1BA-338E-4C12-9C9F-3D4B671B219A}"/>
+                <a16:creationId xmlns:a16="http://schemas.microsoft.com/office/drawing/2014/main" id="{9A1ADB8D-A6F4-467C-8936-5FA8FB4D63E3}"/>
               </a:ext>
             </a:extLst>
           </p:cNvPr>
@@ -11682,7 +11690,7 @@
     </p:spTree>
     <p:extLst>
       <p:ext uri="{BB962C8B-B14F-4D97-AF65-F5344CB8AC3E}">
-        <p14:creationId xmlns:p14="http://schemas.microsoft.com/office/powerpoint/2010/main" val="232429742"/>
+        <p14:creationId xmlns:p14="http://schemas.microsoft.com/office/powerpoint/2010/main" val="287126533"/>
       </p:ext>
     </p:extLst>
   </p:cSld>
@@ -11837,7 +11845,7 @@
           <p:cNvPr id="23" name="">
             <a:extLst xmlns:a="http://schemas.openxmlformats.org/drawingml/2006/main">
               <a:ext uri="{FF2B5EF4-FFF2-40B4-BE49-F238E27FC236}">
-                <a16:creationId xmlns:a16="http://schemas.microsoft.com/office/drawing/2014/main" id="{FF4DBC12-AAF3-4719-90A1-78678E577EA0}"/>
+                <a16:creationId xmlns:a16="http://schemas.microsoft.com/office/drawing/2014/main" id="{0B28B0B4-46CE-4154-8117-32E8ED01422C}"/>
               </a:ext>
             </a:extLst>
           </p:cNvPr>
@@ -11869,7 +11877,7 @@
           <p:cNvPr id="2" name="">
             <a:extLst xmlns:a="http://schemas.openxmlformats.org/drawingml/2006/main">
               <a:ext uri="{FF2B5EF4-FFF2-40B4-BE49-F238E27FC236}">
-                <a16:creationId xmlns:a16="http://schemas.microsoft.com/office/drawing/2014/main" id="{3B749912-64AA-4E0C-A450-ADFB9DFE5BC7}"/>
+                <a16:creationId xmlns:a16="http://schemas.microsoft.com/office/drawing/2014/main" id="{85CD3E04-A03C-406F-8B92-707457D02791}"/>
               </a:ext>
             </a:extLst>
           </p:cNvPr>
@@ -11926,7 +11934,7 @@
           <p:cNvPr id="3" name="">
             <a:extLst xmlns:a="http://schemas.openxmlformats.org/drawingml/2006/main">
               <a:ext uri="{FF2B5EF4-FFF2-40B4-BE49-F238E27FC236}">
-                <a16:creationId xmlns:a16="http://schemas.microsoft.com/office/drawing/2014/main" id="{CB0F2DD6-32AB-4D28-A2AF-A5248398B594}"/>
+                <a16:creationId xmlns:a16="http://schemas.microsoft.com/office/drawing/2014/main" id="{5F3BD76D-C158-4617-BB9D-DF7786F48EF9}"/>
               </a:ext>
             </a:extLst>
           </p:cNvPr>
@@ -11958,7 +11966,7 @@
           <p:cNvPr id="4" name="">
             <a:extLst xmlns:a="http://schemas.openxmlformats.org/drawingml/2006/main">
               <a:ext uri="{FF2B5EF4-FFF2-40B4-BE49-F238E27FC236}">
-                <a16:creationId xmlns:a16="http://schemas.microsoft.com/office/drawing/2014/main" id="{5102253F-D7C9-44FA-BC2E-79684AFC93DF}"/>
+                <a16:creationId xmlns:a16="http://schemas.microsoft.com/office/drawing/2014/main" id="{86BE0541-612A-4D40-A1E3-CA9B87242F6E}"/>
               </a:ext>
             </a:extLst>
           </p:cNvPr>
@@ -12015,7 +12023,7 @@
           <p:cNvPr id="5" name="">
             <a:extLst xmlns:a="http://schemas.openxmlformats.org/drawingml/2006/main">
               <a:ext uri="{FF2B5EF4-FFF2-40B4-BE49-F238E27FC236}">
-                <a16:creationId xmlns:a16="http://schemas.microsoft.com/office/drawing/2014/main" id="{3B753E2F-49F8-493C-A333-2C0E8E7EDE97}"/>
+                <a16:creationId xmlns:a16="http://schemas.microsoft.com/office/drawing/2014/main" id="{C4A6FE5E-2ED8-4427-B294-8F53021FF7BE}"/>
               </a:ext>
             </a:extLst>
           </p:cNvPr>
@@ -12072,7 +12080,7 @@
           <p:cNvPr id="6" name="">
             <a:extLst xmlns:a="http://schemas.openxmlformats.org/drawingml/2006/main">
               <a:ext uri="{FF2B5EF4-FFF2-40B4-BE49-F238E27FC236}">
-                <a16:creationId xmlns:a16="http://schemas.microsoft.com/office/drawing/2014/main" id="{9FA6D707-8E2C-4D11-A7B0-6B8B911811B3}"/>
+                <a16:creationId xmlns:a16="http://schemas.microsoft.com/office/drawing/2014/main" id="{C4839C7E-072F-4D11-A1AE-096960156086}"/>
               </a:ext>
             </a:extLst>
           </p:cNvPr>
@@ -12129,7 +12137,7 @@
           <p:cNvPr id="7" name="">
             <a:extLst xmlns:a="http://schemas.openxmlformats.org/drawingml/2006/main">
               <a:ext uri="{FF2B5EF4-FFF2-40B4-BE49-F238E27FC236}">
-                <a16:creationId xmlns:a16="http://schemas.microsoft.com/office/drawing/2014/main" id="{08B76B76-BE62-4E05-95A7-FAA2F24FC8C5}"/>
+                <a16:creationId xmlns:a16="http://schemas.microsoft.com/office/drawing/2014/main" id="{7AF572D3-EDF0-494E-856B-9A82669DAE9F}"/>
               </a:ext>
             </a:extLst>
           </p:cNvPr>
@@ -12161,7 +12169,7 @@
           <p:cNvPr id="8" name="">
             <a:extLst xmlns:a="http://schemas.openxmlformats.org/drawingml/2006/main">
               <a:ext uri="{FF2B5EF4-FFF2-40B4-BE49-F238E27FC236}">
-                <a16:creationId xmlns:a16="http://schemas.microsoft.com/office/drawing/2014/main" id="{5F2DA00D-6B66-418C-8620-7B486FDFA872}"/>
+                <a16:creationId xmlns:a16="http://schemas.microsoft.com/office/drawing/2014/main" id="{2DDD595C-A04A-4866-AB1C-3426EC5F34F3}"/>
               </a:ext>
             </a:extLst>
           </p:cNvPr>
@@ -12218,7 +12226,7 @@
           <p:cNvPr id="9" name="">
             <a:extLst xmlns:a="http://schemas.openxmlformats.org/drawingml/2006/main">
               <a:ext uri="{FF2B5EF4-FFF2-40B4-BE49-F238E27FC236}">
-                <a16:creationId xmlns:a16="http://schemas.microsoft.com/office/drawing/2014/main" id="{4BF294E7-2FC6-4EF7-AF6D-DEDC685A5425}"/>
+                <a16:creationId xmlns:a16="http://schemas.microsoft.com/office/drawing/2014/main" id="{963756DF-F5A0-48DE-84B3-25C7A4653FE0}"/>
               </a:ext>
             </a:extLst>
           </p:cNvPr>
@@ -12275,7 +12283,7 @@
           <p:cNvPr id="10" name="">
             <a:extLst xmlns:a="http://schemas.openxmlformats.org/drawingml/2006/main">
               <a:ext uri="{FF2B5EF4-FFF2-40B4-BE49-F238E27FC236}">
-                <a16:creationId xmlns:a16="http://schemas.microsoft.com/office/drawing/2014/main" id="{9D55C47A-6191-4670-8699-98CD32317118}"/>
+                <a16:creationId xmlns:a16="http://schemas.microsoft.com/office/drawing/2014/main" id="{78733D84-5B35-4D34-811D-56D19C46761D}"/>
               </a:ext>
             </a:extLst>
           </p:cNvPr>
@@ -12309,7 +12317,7 @@
           <p:cNvPr id="11" name="">
             <a:extLst xmlns:a="http://schemas.openxmlformats.org/drawingml/2006/main">
               <a:ext uri="{FF2B5EF4-FFF2-40B4-BE49-F238E27FC236}">
-                <a16:creationId xmlns:a16="http://schemas.microsoft.com/office/drawing/2014/main" id="{F108FA43-6B08-4DD9-BCC1-A39648509803}"/>
+                <a16:creationId xmlns:a16="http://schemas.microsoft.com/office/drawing/2014/main" id="{61BDE200-D66A-4F7B-BD71-E10AF12DBF1E}"/>
               </a:ext>
             </a:extLst>
           </p:cNvPr>
@@ -12341,7 +12349,7 @@
           <p:cNvPr id="12" name="">
             <a:extLst xmlns:a="http://schemas.openxmlformats.org/drawingml/2006/main">
               <a:ext uri="{FF2B5EF4-FFF2-40B4-BE49-F238E27FC236}">
-                <a16:creationId xmlns:a16="http://schemas.microsoft.com/office/drawing/2014/main" id="{3DFD3A59-C0F1-4B1E-9EE0-A095ED233316}"/>
+                <a16:creationId xmlns:a16="http://schemas.microsoft.com/office/drawing/2014/main" id="{EA3CC425-C667-4694-A159-8E97AE0DFB1F}"/>
               </a:ext>
             </a:extLst>
           </p:cNvPr>
@@ -12398,7 +12406,7 @@
           <p:cNvPr id="13" name="">
             <a:extLst xmlns:a="http://schemas.openxmlformats.org/drawingml/2006/main">
               <a:ext uri="{FF2B5EF4-FFF2-40B4-BE49-F238E27FC236}">
-                <a16:creationId xmlns:a16="http://schemas.microsoft.com/office/drawing/2014/main" id="{CA9B2A17-8180-4B22-823A-899875CF6C5D}"/>
+                <a16:creationId xmlns:a16="http://schemas.microsoft.com/office/drawing/2014/main" id="{974CC378-9841-4B68-B521-FC6D8E8E8982}"/>
               </a:ext>
             </a:extLst>
           </p:cNvPr>
@@ -12455,7 +12463,7 @@
           <p:cNvPr id="14" name="">
             <a:extLst xmlns:a="http://schemas.openxmlformats.org/drawingml/2006/main">
               <a:ext uri="{FF2B5EF4-FFF2-40B4-BE49-F238E27FC236}">
-                <a16:creationId xmlns:a16="http://schemas.microsoft.com/office/drawing/2014/main" id="{CD826141-6AFC-45D9-88DC-7F98D7F1733D}"/>
+                <a16:creationId xmlns:a16="http://schemas.microsoft.com/office/drawing/2014/main" id="{1C331BC2-DD2D-46F4-A61A-44E549D2B7B6}"/>
               </a:ext>
             </a:extLst>
           </p:cNvPr>
@@ -12489,7 +12497,7 @@
           <p:cNvPr id="15" name="">
             <a:extLst xmlns:a="http://schemas.openxmlformats.org/drawingml/2006/main">
               <a:ext uri="{FF2B5EF4-FFF2-40B4-BE49-F238E27FC236}">
-                <a16:creationId xmlns:a16="http://schemas.microsoft.com/office/drawing/2014/main" id="{722A7ED1-3BE4-42AA-8A48-D1A63A083551}"/>
+                <a16:creationId xmlns:a16="http://schemas.microsoft.com/office/drawing/2014/main" id="{5AB6990D-3C41-4119-9AF3-C00773C60C0E}"/>
               </a:ext>
             </a:extLst>
           </p:cNvPr>
@@ -12521,7 +12529,7 @@
           <p:cNvPr id="16" name="">
             <a:extLst xmlns:a="http://schemas.openxmlformats.org/drawingml/2006/main">
               <a:ext uri="{FF2B5EF4-FFF2-40B4-BE49-F238E27FC236}">
-                <a16:creationId xmlns:a16="http://schemas.microsoft.com/office/drawing/2014/main" id="{BBB45547-54F2-4FC6-A607-6F3987067B09}"/>
+                <a16:creationId xmlns:a16="http://schemas.microsoft.com/office/drawing/2014/main" id="{BDD3CA16-76C4-4DAA-BE45-96AFD0F05C9B}"/>
               </a:ext>
             </a:extLst>
           </p:cNvPr>
@@ -12578,7 +12586,7 @@
           <p:cNvPr id="17" name="">
             <a:extLst xmlns:a="http://schemas.openxmlformats.org/drawingml/2006/main">
               <a:ext uri="{FF2B5EF4-FFF2-40B4-BE49-F238E27FC236}">
-                <a16:creationId xmlns:a16="http://schemas.microsoft.com/office/drawing/2014/main" id="{D3EDDE3A-9C94-483E-8714-B0D78139B449}"/>
+                <a16:creationId xmlns:a16="http://schemas.microsoft.com/office/drawing/2014/main" id="{E8F79259-CAAE-4F5E-ABBE-64762271FA36}"/>
               </a:ext>
             </a:extLst>
           </p:cNvPr>
@@ -12635,7 +12643,7 @@
           <p:cNvPr id="18" name="">
             <a:extLst xmlns:a="http://schemas.openxmlformats.org/drawingml/2006/main">
               <a:ext uri="{FF2B5EF4-FFF2-40B4-BE49-F238E27FC236}">
-                <a16:creationId xmlns:a16="http://schemas.microsoft.com/office/drawing/2014/main" id="{38E21D5C-9FAD-480F-A961-B5B4EB149D6B}"/>
+                <a16:creationId xmlns:a16="http://schemas.microsoft.com/office/drawing/2014/main" id="{FC4AEA2B-B60F-4FFE-A007-1C69146CAE49}"/>
               </a:ext>
             </a:extLst>
           </p:cNvPr>
@@ -12669,7 +12677,7 @@
           <p:cNvPr id="19" name="">
             <a:extLst xmlns:a="http://schemas.openxmlformats.org/drawingml/2006/main">
               <a:ext uri="{FF2B5EF4-FFF2-40B4-BE49-F238E27FC236}">
-                <a16:creationId xmlns:a16="http://schemas.microsoft.com/office/drawing/2014/main" id="{6E6F30D1-4D4E-44CF-AFB1-2A12566D2540}"/>
+                <a16:creationId xmlns:a16="http://schemas.microsoft.com/office/drawing/2014/main" id="{23A5CF7A-D6B2-4937-968B-F472E9DB1449}"/>
               </a:ext>
             </a:extLst>
           </p:cNvPr>
@@ -12701,7 +12709,7 @@
           <p:cNvPr id="20" name="">
             <a:extLst xmlns:a="http://schemas.openxmlformats.org/drawingml/2006/main">
               <a:ext uri="{FF2B5EF4-FFF2-40B4-BE49-F238E27FC236}">
-                <a16:creationId xmlns:a16="http://schemas.microsoft.com/office/drawing/2014/main" id="{81581BA5-F043-4EF0-BCAC-1B89B3ADEC5B}"/>
+                <a16:creationId xmlns:a16="http://schemas.microsoft.com/office/drawing/2014/main" id="{0CE13A2B-A459-409F-AE21-AB33B7575466}"/>
               </a:ext>
             </a:extLst>
           </p:cNvPr>
@@ -12758,7 +12766,7 @@
           <p:cNvPr id="21" name="">
             <a:extLst xmlns:a="http://schemas.openxmlformats.org/drawingml/2006/main">
               <a:ext uri="{FF2B5EF4-FFF2-40B4-BE49-F238E27FC236}">
-                <a16:creationId xmlns:a16="http://schemas.microsoft.com/office/drawing/2014/main" id="{F858CBBA-304B-43DD-A064-92C21198D20D}"/>
+                <a16:creationId xmlns:a16="http://schemas.microsoft.com/office/drawing/2014/main" id="{43B7FCC6-0B3C-42F3-B146-2407D5302DE2}"/>
               </a:ext>
             </a:extLst>
           </p:cNvPr>
@@ -12815,7 +12823,7 @@
           <p:cNvPr id="22" name="">
             <a:extLst xmlns:a="http://schemas.openxmlformats.org/drawingml/2006/main">
               <a:ext uri="{FF2B5EF4-FFF2-40B4-BE49-F238E27FC236}">
-                <a16:creationId xmlns:a16="http://schemas.microsoft.com/office/drawing/2014/main" id="{710BBF21-3A20-44A6-B89A-5CFB5447522C}"/>
+                <a16:creationId xmlns:a16="http://schemas.microsoft.com/office/drawing/2014/main" id="{942A465D-6107-4E29-BBEE-987FF723EE41}"/>
               </a:ext>
             </a:extLst>
           </p:cNvPr>
@@ -12870,7 +12878,7 @@
     </p:spTree>
     <p:extLst>
       <p:ext uri="{BB962C8B-B14F-4D97-AF65-F5344CB8AC3E}">
-        <p14:creationId xmlns:p14="http://schemas.microsoft.com/office/powerpoint/2010/main" val="1365508396"/>
+        <p14:creationId xmlns:p14="http://schemas.microsoft.com/office/powerpoint/2010/main" val="1691534082"/>
       </p:ext>
     </p:extLst>
   </p:cSld>
@@ -13071,7 +13079,7 @@
           <p:cNvPr id="22" name="">
             <a:extLst xmlns:a="http://schemas.openxmlformats.org/drawingml/2006/main">
               <a:ext uri="{FF2B5EF4-FFF2-40B4-BE49-F238E27FC236}">
-                <a16:creationId xmlns:a16="http://schemas.microsoft.com/office/drawing/2014/main" id="{94FF53C2-1C17-4EB3-BCE4-9D7287FC69E1}"/>
+                <a16:creationId xmlns:a16="http://schemas.microsoft.com/office/drawing/2014/main" id="{836B29C6-273E-433E-9BD5-2EE1CE970EAB}"/>
               </a:ext>
             </a:extLst>
           </p:cNvPr>
@@ -13103,7 +13111,7 @@
           <p:cNvPr id="2" name="">
             <a:extLst xmlns:a="http://schemas.openxmlformats.org/drawingml/2006/main">
               <a:ext uri="{FF2B5EF4-FFF2-40B4-BE49-F238E27FC236}">
-                <a16:creationId xmlns:a16="http://schemas.microsoft.com/office/drawing/2014/main" id="{8C73BA16-DB88-4C31-9C29-01A7695EF56C}"/>
+                <a16:creationId xmlns:a16="http://schemas.microsoft.com/office/drawing/2014/main" id="{2CC785CE-2B32-4F74-9901-43DE0E6C5A1F}"/>
               </a:ext>
             </a:extLst>
           </p:cNvPr>
@@ -13160,7 +13168,7 @@
           <p:cNvPr id="3" name="">
             <a:extLst xmlns:a="http://schemas.openxmlformats.org/drawingml/2006/main">
               <a:ext uri="{FF2B5EF4-FFF2-40B4-BE49-F238E27FC236}">
-                <a16:creationId xmlns:a16="http://schemas.microsoft.com/office/drawing/2014/main" id="{60FAF2F7-0EB4-4B36-A287-50C2330F3F96}"/>
+                <a16:creationId xmlns:a16="http://schemas.microsoft.com/office/drawing/2014/main" id="{936DDC8E-0E7E-4AA2-BA0D-CA1AFB68F9E2}"/>
               </a:ext>
             </a:extLst>
           </p:cNvPr>
@@ -13192,7 +13200,7 @@
           <p:cNvPr id="4" name="">
             <a:extLst xmlns:a="http://schemas.openxmlformats.org/drawingml/2006/main">
               <a:ext uri="{FF2B5EF4-FFF2-40B4-BE49-F238E27FC236}">
-                <a16:creationId xmlns:a16="http://schemas.microsoft.com/office/drawing/2014/main" id="{A6F8E5E3-E3A3-445C-9CBF-3E5A5211BF31}"/>
+                <a16:creationId xmlns:a16="http://schemas.microsoft.com/office/drawing/2014/main" id="{EB15D380-6256-40AC-8B31-B713F4CB04BB}"/>
               </a:ext>
             </a:extLst>
           </p:cNvPr>
@@ -13249,7 +13257,7 @@
           <p:cNvPr id="5" name="">
             <a:extLst xmlns:a="http://schemas.openxmlformats.org/drawingml/2006/main">
               <a:ext uri="{FF2B5EF4-FFF2-40B4-BE49-F238E27FC236}">
-                <a16:creationId xmlns:a16="http://schemas.microsoft.com/office/drawing/2014/main" id="{AE8A15B6-8DE1-4C6E-9C74-B351307A4A78}"/>
+                <a16:creationId xmlns:a16="http://schemas.microsoft.com/office/drawing/2014/main" id="{D3DB993E-A319-46D2-9B69-1C175FF9BC2D}"/>
               </a:ext>
             </a:extLst>
           </p:cNvPr>
@@ -13306,7 +13314,7 @@
           <p:cNvPr id="6" name="">
             <a:extLst xmlns:a="http://schemas.openxmlformats.org/drawingml/2006/main">
               <a:ext uri="{FF2B5EF4-FFF2-40B4-BE49-F238E27FC236}">
-                <a16:creationId xmlns:a16="http://schemas.microsoft.com/office/drawing/2014/main" id="{74CE23EC-53D7-48B5-9138-638757FCA511}"/>
+                <a16:creationId xmlns:a16="http://schemas.microsoft.com/office/drawing/2014/main" id="{BA73F908-3D29-449D-BA22-A0A47919D78E}"/>
               </a:ext>
             </a:extLst>
           </p:cNvPr>
@@ -13363,7 +13371,7 @@
           <p:cNvPr id="7" name="">
             <a:extLst xmlns:a="http://schemas.openxmlformats.org/drawingml/2006/main">
               <a:ext uri="{FF2B5EF4-FFF2-40B4-BE49-F238E27FC236}">
-                <a16:creationId xmlns:a16="http://schemas.microsoft.com/office/drawing/2014/main" id="{E5350D90-337D-471C-B019-FDE08E655E70}"/>
+                <a16:creationId xmlns:a16="http://schemas.microsoft.com/office/drawing/2014/main" id="{D7B2DB00-0E4B-4F6A-9F48-E14B4D129755}"/>
               </a:ext>
             </a:extLst>
           </p:cNvPr>
@@ -13395,7 +13403,7 @@
           <p:cNvPr id="8" name="">
             <a:extLst xmlns:a="http://schemas.openxmlformats.org/drawingml/2006/main">
               <a:ext uri="{FF2B5EF4-FFF2-40B4-BE49-F238E27FC236}">
-                <a16:creationId xmlns:a16="http://schemas.microsoft.com/office/drawing/2014/main" id="{6983FAD1-8161-4A33-B01A-265BAC38AFEC}"/>
+                <a16:creationId xmlns:a16="http://schemas.microsoft.com/office/drawing/2014/main" id="{297C7E59-3AA8-4754-8920-BFB3F98E1051}"/>
               </a:ext>
             </a:extLst>
           </p:cNvPr>
@@ -13452,7 +13460,7 @@
           <p:cNvPr id="9" name="">
             <a:extLst xmlns:a="http://schemas.openxmlformats.org/drawingml/2006/main">
               <a:ext uri="{FF2B5EF4-FFF2-40B4-BE49-F238E27FC236}">
-                <a16:creationId xmlns:a16="http://schemas.microsoft.com/office/drawing/2014/main" id="{9F9A3525-C9B7-44D8-ACA2-604B59477514}"/>
+                <a16:creationId xmlns:a16="http://schemas.microsoft.com/office/drawing/2014/main" id="{90BE843C-C754-4AFC-A55F-EE96DEFFFBEC}"/>
               </a:ext>
             </a:extLst>
           </p:cNvPr>
@@ -13509,7 +13517,7 @@
           <p:cNvPr id="10" name="">
             <a:extLst xmlns:a="http://schemas.openxmlformats.org/drawingml/2006/main">
               <a:ext uri="{FF2B5EF4-FFF2-40B4-BE49-F238E27FC236}">
-                <a16:creationId xmlns:a16="http://schemas.microsoft.com/office/drawing/2014/main" id="{4774188C-FC0C-4C55-B0F7-190C74A9068D}"/>
+                <a16:creationId xmlns:a16="http://schemas.microsoft.com/office/drawing/2014/main" id="{A7379E97-5D2B-4276-9211-14D434E4B563}"/>
               </a:ext>
             </a:extLst>
           </p:cNvPr>
@@ -13543,7 +13551,7 @@
           <p:cNvPr id="11" name="">
             <a:extLst xmlns:a="http://schemas.openxmlformats.org/drawingml/2006/main">
               <a:ext uri="{FF2B5EF4-FFF2-40B4-BE49-F238E27FC236}">
-                <a16:creationId xmlns:a16="http://schemas.microsoft.com/office/drawing/2014/main" id="{F111C740-9776-4DF7-AB8D-37FF2EC513FE}"/>
+                <a16:creationId xmlns:a16="http://schemas.microsoft.com/office/drawing/2014/main" id="{07DE110B-40EB-4EC2-A5CE-E51477D97B39}"/>
               </a:ext>
             </a:extLst>
           </p:cNvPr>
@@ -13575,7 +13583,7 @@
           <p:cNvPr id="12" name="">
             <a:extLst xmlns:a="http://schemas.openxmlformats.org/drawingml/2006/main">
               <a:ext uri="{FF2B5EF4-FFF2-40B4-BE49-F238E27FC236}">
-                <a16:creationId xmlns:a16="http://schemas.microsoft.com/office/drawing/2014/main" id="{7E38BC0D-7038-4010-8A11-A4F8755A055C}"/>
+                <a16:creationId xmlns:a16="http://schemas.microsoft.com/office/drawing/2014/main" id="{82E59496-8644-4EE2-8755-EB0B5B582A3A}"/>
               </a:ext>
             </a:extLst>
           </p:cNvPr>
@@ -13632,7 +13640,7 @@
           <p:cNvPr id="13" name="">
             <a:extLst xmlns:a="http://schemas.openxmlformats.org/drawingml/2006/main">
               <a:ext uri="{FF2B5EF4-FFF2-40B4-BE49-F238E27FC236}">
-                <a16:creationId xmlns:a16="http://schemas.microsoft.com/office/drawing/2014/main" id="{5D28DC89-9B6F-4191-A2D1-3775788DC919}"/>
+                <a16:creationId xmlns:a16="http://schemas.microsoft.com/office/drawing/2014/main" id="{56533D32-2866-474E-845E-D70A9D2F7EC9}"/>
               </a:ext>
             </a:extLst>
           </p:cNvPr>
@@ -13689,7 +13697,7 @@
           <p:cNvPr id="14" name="">
             <a:extLst xmlns:a="http://schemas.openxmlformats.org/drawingml/2006/main">
               <a:ext uri="{FF2B5EF4-FFF2-40B4-BE49-F238E27FC236}">
-                <a16:creationId xmlns:a16="http://schemas.microsoft.com/office/drawing/2014/main" id="{D5B1EFA1-18DD-48AF-9FF1-6E945E155DCA}"/>
+                <a16:creationId xmlns:a16="http://schemas.microsoft.com/office/drawing/2014/main" id="{B0DC1C90-3E14-43AE-99DA-F1AA34A9E520}"/>
               </a:ext>
             </a:extLst>
           </p:cNvPr>
@@ -13723,7 +13731,7 @@
           <p:cNvPr id="15" name="">
             <a:extLst xmlns:a="http://schemas.openxmlformats.org/drawingml/2006/main">
               <a:ext uri="{FF2B5EF4-FFF2-40B4-BE49-F238E27FC236}">
-                <a16:creationId xmlns:a16="http://schemas.microsoft.com/office/drawing/2014/main" id="{34303BA5-2A97-49C1-A603-A1686E87709C}"/>
+                <a16:creationId xmlns:a16="http://schemas.microsoft.com/office/drawing/2014/main" id="{75CF5818-A07E-42E2-83F6-416BD1AAE292}"/>
               </a:ext>
             </a:extLst>
           </p:cNvPr>
@@ -13755,7 +13763,7 @@
           <p:cNvPr id="16" name="">
             <a:extLst xmlns:a="http://schemas.openxmlformats.org/drawingml/2006/main">
               <a:ext uri="{FF2B5EF4-FFF2-40B4-BE49-F238E27FC236}">
-                <a16:creationId xmlns:a16="http://schemas.microsoft.com/office/drawing/2014/main" id="{0D8DB26A-75F1-45DD-A4A6-8086A27D48FB}"/>
+                <a16:creationId xmlns:a16="http://schemas.microsoft.com/office/drawing/2014/main" id="{8E284C76-9F19-4311-BCB3-C1596DD6C2B4}"/>
               </a:ext>
             </a:extLst>
           </p:cNvPr>
@@ -13812,7 +13820,7 @@
           <p:cNvPr id="17" name="">
             <a:extLst xmlns:a="http://schemas.openxmlformats.org/drawingml/2006/main">
               <a:ext uri="{FF2B5EF4-FFF2-40B4-BE49-F238E27FC236}">
-                <a16:creationId xmlns:a16="http://schemas.microsoft.com/office/drawing/2014/main" id="{BED4B88E-5905-4032-AA17-863A67ABA3C0}"/>
+                <a16:creationId xmlns:a16="http://schemas.microsoft.com/office/drawing/2014/main" id="{5FE1B51A-068F-4CDB-A2BD-A24A598123D8}"/>
               </a:ext>
             </a:extLst>
           </p:cNvPr>
@@ -13869,7 +13877,7 @@
           <p:cNvPr id="18" name="">
             <a:extLst xmlns:a="http://schemas.openxmlformats.org/drawingml/2006/main">
               <a:ext uri="{FF2B5EF4-FFF2-40B4-BE49-F238E27FC236}">
-                <a16:creationId xmlns:a16="http://schemas.microsoft.com/office/drawing/2014/main" id="{D9AA5F34-1FBD-4668-8BD8-E2FD1CBC1563}"/>
+                <a16:creationId xmlns:a16="http://schemas.microsoft.com/office/drawing/2014/main" id="{492B5F27-1A69-4E02-A36F-AD0BA4F4E44B}"/>
               </a:ext>
             </a:extLst>
           </p:cNvPr>
@@ -13903,7 +13911,7 @@
           <p:cNvPr id="19" name="">
             <a:extLst xmlns:a="http://schemas.openxmlformats.org/drawingml/2006/main">
               <a:ext uri="{FF2B5EF4-FFF2-40B4-BE49-F238E27FC236}">
-                <a16:creationId xmlns:a16="http://schemas.microsoft.com/office/drawing/2014/main" id="{04E7354B-1FFC-4F62-ABE5-E9BDD3FEDD92}"/>
+                <a16:creationId xmlns:a16="http://schemas.microsoft.com/office/drawing/2014/main" id="{52CEA9C4-61B2-4742-8C5B-759B21F6E1DD}"/>
               </a:ext>
             </a:extLst>
           </p:cNvPr>
@@ -13935,7 +13943,7 @@
           <p:cNvPr id="20" name="">
             <a:extLst xmlns:a="http://schemas.openxmlformats.org/drawingml/2006/main">
               <a:ext uri="{FF2B5EF4-FFF2-40B4-BE49-F238E27FC236}">
-                <a16:creationId xmlns:a16="http://schemas.microsoft.com/office/drawing/2014/main" id="{C127A4BF-1321-4687-B753-592AF65BC785}"/>
+                <a16:creationId xmlns:a16="http://schemas.microsoft.com/office/drawing/2014/main" id="{B1AC910A-08CD-4A9B-8397-8FDABD22A8CE}"/>
               </a:ext>
             </a:extLst>
           </p:cNvPr>
@@ -13992,7 +14000,7 @@
           <p:cNvPr id="21" name="">
             <a:extLst xmlns:a="http://schemas.openxmlformats.org/drawingml/2006/main">
               <a:ext uri="{FF2B5EF4-FFF2-40B4-BE49-F238E27FC236}">
-                <a16:creationId xmlns:a16="http://schemas.microsoft.com/office/drawing/2014/main" id="{067D395C-C0EB-4AF5-99E6-FC397B43F846}"/>
+                <a16:creationId xmlns:a16="http://schemas.microsoft.com/office/drawing/2014/main" id="{30A01F17-B1F1-4413-9EAA-D1AD4342450D}"/>
               </a:ext>
             </a:extLst>
           </p:cNvPr>
@@ -14047,7 +14055,7 @@
     </p:spTree>
     <p:extLst>
       <p:ext uri="{BB962C8B-B14F-4D97-AF65-F5344CB8AC3E}">
-        <p14:creationId xmlns:p14="http://schemas.microsoft.com/office/powerpoint/2010/main" val="298529946"/>
+        <p14:creationId xmlns:p14="http://schemas.microsoft.com/office/powerpoint/2010/main" val="586683566"/>
       </p:ext>
     </p:extLst>
   </p:cSld>
